--- a/mon/toan/slide/lop12/BaiGiangDienTu_TOAN12_BaiTapCuoiChuong2_T40-41.pptx
+++ b/mon/toan/slide/lop12/BaiGiangDienTu_TOAN12_BaiTapCuoiChuong2_T40-41.pptx
@@ -20522,7 +20522,7 @@
             <p:spPr>
               <a:xfrm>
                 <a:off x="548640" y="1371600"/>
-                <a:ext cx="11064240" cy="1493520"/>
+                <a:ext cx="11064240" cy="783335"/>
               </a:xfrm>
               <a:prstGeom prst="rect">
                 <a:avLst/>
@@ -20719,6 +20719,661 @@
                   <a:t>.</a:t>
                 </a:r>
               </a:p>
+            </p:txBody>
+          </p:sp>
+        </mc:Choice>
+        <mc:Fallback>
+          <p:sp>
+            <p:nvSpPr>
+              <p:cNvPr id="7" name="TextBox 6"/>
+              <p:cNvSpPr txBox="1"/>
+              <p:nvPr/>
+            </p:nvSpPr>
+            <p:spPr>
+              <a:xfrm>
+                <a:off x="548640" y="1371600"/>
+                <a:ext cx="11064240" cy="783335"/>
+              </a:xfrm>
+              <a:prstGeom prst="rect">
+                <a:avLst/>
+              </a:prstGeom>
+              <a:noFill/>
+            </p:spPr>
+            <p:txBody>
+              <a:bodyPr wrap="square" anchor="t" lIns="45720" rIns="45720">
+                <a:spAutoFit/>
+              </a:bodyPr>
+              <a:lstStyle/>
+              <a:p>
+                <a:pPr algn="l">
+                  <a:spcAft>
+                    <a:spcPts val="800"/>
+                  </a:spcAft>
+                </a:pPr>
+                <a:r>
+                  <a:rPr sz="2000" b="1">
+                    <a:solidFill>
+                      <a:srgbClr val="1E293B"/>
+                    </a:solidFill>
+                    <a:latin typeface="Calibri"/>
+                  </a:rPr>
+                  <a:t>2.35.</a:t>
+                </a:r>
+                <a:r>
+                  <a:rPr sz="2000">
+                    <a:solidFill>
+                      <a:srgbClr val="1E293B"/>
+                    </a:solidFill>
+                    <a:latin typeface="Calibri"/>
+                  </a:rPr>
+                  <a:t> Cho hình chóp </a:t>
+                </a:r>
+                <a:r>
+                  <a:rPr lang="vi-VN"/>
+                  <a:t>S.ABCD</a:t>
+                </a:r>
+                <a:r>
+                  <a:rPr sz="2000">
+                    <a:solidFill>
+                      <a:srgbClr val="1E293B"/>
+                    </a:solidFill>
+                    <a:latin typeface="Calibri"/>
+                  </a:rPr>
+                  <a:t> có đáy </a:t>
+                </a:r>
+                <a:r>
+                  <a:rPr lang="vi-VN"/>
+                  <a:t>ABCD</a:t>
+                </a:r>
+                <a:r>
+                  <a:rPr sz="2000">
+                    <a:solidFill>
+                      <a:srgbClr val="1E293B"/>
+                    </a:solidFill>
+                    <a:latin typeface="Calibri"/>
+                  </a:rPr>
+                  <a:t> là hình chữ nhật. Chứng minh rằng </a:t>
+                </a:r>
+                <a:r>
+                  <a:rPr lang="vi-VN"/>
+                  <a:t>\overrightarrow{SA}</a:t>
+                </a:r>
+                <a:r>
+                  <a:rPr sz="2000">
+                    <a:solidFill>
+                      <a:srgbClr val="1E293B"/>
+                    </a:solidFill>
+                    <a:latin typeface="Calibri"/>
+                  </a:rPr>
+                  <a:t> + </a:t>
+                </a:r>
+                <a:r>
+                  <a:rPr lang="vi-VN"/>
+                  <a:t>\overrightarrow{SC}</a:t>
+                </a:r>
+                <a:r>
+                  <a:rPr sz="2000">
+                    <a:solidFill>
+                      <a:srgbClr val="1E293B"/>
+                    </a:solidFill>
+                    <a:latin typeface="Calibri"/>
+                  </a:rPr>
+                  <a:t> = </a:t>
+                </a:r>
+                <a:r>
+                  <a:rPr lang="vi-VN"/>
+                  <a:t>\overrightarrow{SB}</a:t>
+                </a:r>
+                <a:r>
+                  <a:rPr sz="2000">
+                    <a:solidFill>
+                      <a:srgbClr val="1E293B"/>
+                    </a:solidFill>
+                    <a:latin typeface="Calibri"/>
+                  </a:rPr>
+                  <a:t> + </a:t>
+                </a:r>
+                <a:r>
+                  <a:rPr lang="vi-VN"/>
+                  <a:t>\overrightarrow{SD}</a:t>
+                </a:r>
+                <a:r>
+                  <a:rPr sz="2000">
+                    <a:solidFill>
+                      <a:srgbClr val="1E293B"/>
+                    </a:solidFill>
+                    <a:latin typeface="Calibri"/>
+                  </a:rPr>
+                  <a:t>.</a:t>
+                </a:r>
+              </a:p>
+            </p:txBody>
+          </p:sp>
+        </mc:Fallback>
+      </mc:AlternateContent>
+      <p:sp>
+        <p:nvSpPr>
+          <p:cNvPr id="8" name="s1_nen"/>
+          <p:cNvSpPr/>
+          <p:nvPr/>
+        </p:nvSpPr>
+        <p:spPr>
+          <a:xfrm>
+            <a:off x="548640" y="2218944"/>
+            <a:ext cx="11064240" cy="874775"/>
+          </a:xfrm>
+          <a:prstGeom prst="roundRect">
+            <a:avLst>
+              <a:gd name="adj" fmla="val 6000"/>
+            </a:avLst>
+          </a:prstGeom>
+          <a:solidFill>
+            <a:srgbClr val="ECFDF3"/>
+          </a:solidFill>
+          <a:ln w="19050">
+            <a:solidFill>
+              <a:srgbClr val="166534"/>
+            </a:solidFill>
+          </a:ln>
+          <a:effectLst/>
+        </p:spPr>
+        <p:style>
+          <a:lnRef idx="1">
+            <a:schemeClr val="accent1"/>
+          </a:lnRef>
+          <a:fillRef idx="3">
+            <a:schemeClr val="accent1"/>
+          </a:fillRef>
+          <a:effectRef idx="2">
+            <a:schemeClr val="accent1"/>
+          </a:effectRef>
+          <a:fontRef idx="minor">
+            <a:schemeClr val="lt1"/>
+          </a:fontRef>
+        </p:style>
+        <p:txBody>
+          <a:bodyPr rtlCol="0" anchor="ctr"/>
+          <a:lstStyle/>
+          <a:p>
+            <a:pPr algn="ctr"/>
+          </a:p>
+        </p:txBody>
+      </p:sp>
+      <mc:AlternateContent xmlns:mc="http://schemas.openxmlformats.org/markup-compatibility/2006">
+        <mc:Choice xmlns:a14="http://schemas.microsoft.com/office/drawing/2010/main" Requires="a14">
+          <p:sp>
+            <p:nvSpPr>
+              <p:cNvPr id="9" name="s1_chu"/>
+              <p:cNvSpPr txBox="1"/>
+              <p:nvPr/>
+            </p:nvSpPr>
+            <p:spPr>
+              <a:xfrm>
+                <a:off x="713232" y="2255520"/>
+                <a:ext cx="10735056" cy="801623"/>
+              </a:xfrm>
+              <a:prstGeom prst="rect">
+                <a:avLst/>
+              </a:prstGeom>
+              <a:noFill/>
+            </p:spPr>
+            <p:txBody>
+              <a:bodyPr wrap="square" anchor="ctr" lIns="45720" rIns="45720">
+                <a:spAutoFit/>
+              </a:bodyPr>
+              <a:lstStyle/>
+              <a:p>
+                <a:pPr algn="l">
+                  <a:spcAft>
+                    <a:spcPts val="800"/>
+                  </a:spcAft>
+                </a:pPr>
+                <a:r>
+                  <a:rPr sz="2000" b="1">
+                    <a:solidFill>
+                      <a:srgbClr val="1E293B"/>
+                    </a:solidFill>
+                    <a:latin typeface="Calibri"/>
+                  </a:rPr>
+                  <a:t>2.35.</a:t>
+                </a:r>
+                <a:r>
+                  <a:rPr sz="2000">
+                    <a:solidFill>
+                      <a:srgbClr val="1E293B"/>
+                    </a:solidFill>
+                    <a:latin typeface="Calibri"/>
+                  </a:rPr>
+                  <a:t> Gọi </a:t>
+                </a:r>
+                <a14:m>
+                  <m:oMath xmlns:m="http://schemas.openxmlformats.org/officeDocument/2006/math">
+                    <m:r>
+                      <a:rPr lang="vi-VN" sz="2000" b="0">
+                        <a:solidFill>
+                          <a:srgbClr val="1E293B"/>
+                        </a:solidFill>
+                        <a:latin typeface="Cambria Math" panose="02040503050406030204" pitchFamily="18" charset="0"/>
+                      </a:rPr>
+                      <m:t>O</m:t>
+                    </m:r>
+                  </m:oMath>
+                </a14:m>
+                <a:r>
+                  <a:rPr sz="2000">
+                    <a:solidFill>
+                      <a:srgbClr val="1E293B"/>
+                    </a:solidFill>
+                    <a:latin typeface="Calibri"/>
+                  </a:rPr>
+                  <a:t> là giao điểm hai đường chéo (trung điểm </a:t>
+                </a:r>
+                <a14:m>
+                  <m:oMath xmlns:m="http://schemas.openxmlformats.org/officeDocument/2006/math">
+                    <m:r>
+                      <a:rPr lang="vi-VN" sz="2000" b="0">
+                        <a:solidFill>
+                          <a:srgbClr val="1E293B"/>
+                        </a:solidFill>
+                        <a:latin typeface="Cambria Math" panose="02040503050406030204" pitchFamily="18" charset="0"/>
+                      </a:rPr>
+                      <m:t>AC</m:t>
+                    </m:r>
+                  </m:oMath>
+                </a14:m>
+                <a:r>
+                  <a:rPr sz="2000">
+                    <a:solidFill>
+                      <a:srgbClr val="1E293B"/>
+                    </a:solidFill>
+                    <a:latin typeface="Calibri"/>
+                  </a:rPr>
+                  <a:t> và </a:t>
+                </a:r>
+                <a14:m>
+                  <m:oMath xmlns:m="http://schemas.openxmlformats.org/officeDocument/2006/math">
+                    <m:r>
+                      <a:rPr lang="vi-VN" sz="2000" b="0">
+                        <a:solidFill>
+                          <a:srgbClr val="1E293B"/>
+                        </a:solidFill>
+                        <a:latin typeface="Cambria Math" panose="02040503050406030204" pitchFamily="18" charset="0"/>
+                      </a:rPr>
+                      <m:t>BD</m:t>
+                    </m:r>
+                  </m:oMath>
+                </a14:m>
+                <a:r>
+                  <a:rPr sz="2000">
+                    <a:solidFill>
+                      <a:srgbClr val="1E293B"/>
+                    </a:solidFill>
+                    <a:latin typeface="Calibri"/>
+                  </a:rPr>
+                  <a:t>): </a:t>
+                </a:r>
+                <a14:m>
+                  <m:oMath xmlns:m="http://schemas.openxmlformats.org/officeDocument/2006/math">
+                    <m:acc>
+                      <m:accPr>
+                        <m:chr m:val="⃗"/>
+                      </m:accPr>
+                      <m:e>
+                        <m:r>
+                          <a:rPr lang="vi-VN" sz="2000" b="0">
+                            <a:solidFill>
+                              <a:srgbClr val="1E293B"/>
+                            </a:solidFill>
+                            <a:latin typeface="Cambria Math" panose="02040503050406030204" pitchFamily="18" charset="0"/>
+                          </a:rPr>
+                          <m:t>SA</m:t>
+                        </m:r>
+                      </m:e>
+                    </m:acc>
+                  </m:oMath>
+                </a14:m>
+                <a:r>
+                  <a:rPr sz="2000">
+                    <a:solidFill>
+                      <a:srgbClr val="1E293B"/>
+                    </a:solidFill>
+                    <a:latin typeface="Calibri"/>
+                  </a:rPr>
+                  <a:t> + </a:t>
+                </a:r>
+                <a14:m>
+                  <m:oMath xmlns:m="http://schemas.openxmlformats.org/officeDocument/2006/math">
+                    <m:acc>
+                      <m:accPr>
+                        <m:chr m:val="⃗"/>
+                      </m:accPr>
+                      <m:e>
+                        <m:r>
+                          <a:rPr lang="vi-VN" sz="2000" b="0">
+                            <a:solidFill>
+                              <a:srgbClr val="1E293B"/>
+                            </a:solidFill>
+                            <a:latin typeface="Cambria Math" panose="02040503050406030204" pitchFamily="18" charset="0"/>
+                          </a:rPr>
+                          <m:t>SC</m:t>
+                        </m:r>
+                      </m:e>
+                    </m:acc>
+                  </m:oMath>
+                </a14:m>
+                <a:r>
+                  <a:rPr sz="2000">
+                    <a:solidFill>
+                      <a:srgbClr val="1E293B"/>
+                    </a:solidFill>
+                    <a:latin typeface="Calibri"/>
+                  </a:rPr>
+                  <a:t> = </a:t>
+                </a:r>
+                <a14:m>
+                  <m:oMath xmlns:m="http://schemas.openxmlformats.org/officeDocument/2006/math">
+                    <m:r>
+                      <a:rPr lang="vi-VN" sz="2000" b="0">
+                        <a:solidFill>
+                          <a:srgbClr val="1E293B"/>
+                        </a:solidFill>
+                        <a:latin typeface="Cambria Math" panose="02040503050406030204" pitchFamily="18" charset="0"/>
+                      </a:rPr>
+                      <m:t>2</m:t>
+                    </m:r>
+                  </m:oMath>
+                </a14:m>
+                <a:r>
+                  <a:rPr sz="2000">
+                    <a:solidFill>
+                      <a:srgbClr val="1E293B"/>
+                    </a:solidFill>
+                    <a:latin typeface="Calibri"/>
+                  </a:rPr>
+                  <a:t> </a:t>
+                </a:r>
+                <a14:m>
+                  <m:oMath xmlns:m="http://schemas.openxmlformats.org/officeDocument/2006/math">
+                    <m:acc>
+                      <m:accPr>
+                        <m:chr m:val="⃗"/>
+                      </m:accPr>
+                      <m:e>
+                        <m:r>
+                          <a:rPr lang="vi-VN" sz="2000" b="0">
+                            <a:solidFill>
+                              <a:srgbClr val="1E293B"/>
+                            </a:solidFill>
+                            <a:latin typeface="Cambria Math" panose="02040503050406030204" pitchFamily="18" charset="0"/>
+                          </a:rPr>
+                          <m:t>SO</m:t>
+                        </m:r>
+                      </m:e>
+                    </m:acc>
+                  </m:oMath>
+                </a14:m>
+                <a:r>
+                  <a:rPr sz="2000">
+                    <a:solidFill>
+                      <a:srgbClr val="1E293B"/>
+                    </a:solidFill>
+                    <a:latin typeface="Calibri"/>
+                  </a:rPr>
+                  <a:t> = </a:t>
+                </a:r>
+                <a14:m>
+                  <m:oMath xmlns:m="http://schemas.openxmlformats.org/officeDocument/2006/math">
+                    <m:acc>
+                      <m:accPr>
+                        <m:chr m:val="⃗"/>
+                      </m:accPr>
+                      <m:e>
+                        <m:r>
+                          <a:rPr lang="vi-VN" sz="2000" b="0">
+                            <a:solidFill>
+                              <a:srgbClr val="1E293B"/>
+                            </a:solidFill>
+                            <a:latin typeface="Cambria Math" panose="02040503050406030204" pitchFamily="18" charset="0"/>
+                          </a:rPr>
+                          <m:t>SB</m:t>
+                        </m:r>
+                      </m:e>
+                    </m:acc>
+                  </m:oMath>
+                </a14:m>
+                <a:r>
+                  <a:rPr sz="2000">
+                    <a:solidFill>
+                      <a:srgbClr val="1E293B"/>
+                    </a:solidFill>
+                    <a:latin typeface="Calibri"/>
+                  </a:rPr>
+                  <a:t> + </a:t>
+                </a:r>
+                <a14:m>
+                  <m:oMath xmlns:m="http://schemas.openxmlformats.org/officeDocument/2006/math">
+                    <m:acc>
+                      <m:accPr>
+                        <m:chr m:val="⃗"/>
+                      </m:accPr>
+                      <m:e>
+                        <m:r>
+                          <a:rPr lang="vi-VN" sz="2000" b="0">
+                            <a:solidFill>
+                              <a:srgbClr val="1E293B"/>
+                            </a:solidFill>
+                            <a:latin typeface="Cambria Math" panose="02040503050406030204" pitchFamily="18" charset="0"/>
+                          </a:rPr>
+                          <m:t>SD</m:t>
+                        </m:r>
+                      </m:e>
+                    </m:acc>
+                  </m:oMath>
+                </a14:m>
+                <a:r>
+                  <a:rPr sz="2000">
+                    <a:solidFill>
+                      <a:srgbClr val="1E293B"/>
+                    </a:solidFill>
+                    <a:latin typeface="Calibri"/>
+                  </a:rPr>
+                  <a:t>.</a:t>
+                </a:r>
+              </a:p>
+            </p:txBody>
+          </p:sp>
+        </mc:Choice>
+        <mc:Fallback>
+          <p:sp>
+            <p:nvSpPr>
+              <p:cNvPr id="9" name="TextBox 8"/>
+              <p:cNvSpPr txBox="1"/>
+              <p:nvPr/>
+            </p:nvSpPr>
+            <p:spPr>
+              <a:xfrm>
+                <a:off x="713232" y="2255520"/>
+                <a:ext cx="10735056" cy="801623"/>
+              </a:xfrm>
+              <a:prstGeom prst="rect">
+                <a:avLst/>
+              </a:prstGeom>
+              <a:noFill/>
+            </p:spPr>
+            <p:txBody>
+              <a:bodyPr wrap="square" anchor="ctr" lIns="45720" rIns="45720">
+                <a:spAutoFit/>
+              </a:bodyPr>
+              <a:lstStyle/>
+              <a:p>
+                <a:pPr algn="l">
+                  <a:spcAft>
+                    <a:spcPts val="800"/>
+                  </a:spcAft>
+                </a:pPr>
+                <a:r>
+                  <a:rPr sz="2000" b="1">
+                    <a:solidFill>
+                      <a:srgbClr val="1E293B"/>
+                    </a:solidFill>
+                    <a:latin typeface="Calibri"/>
+                  </a:rPr>
+                  <a:t>2.35.</a:t>
+                </a:r>
+                <a:r>
+                  <a:rPr sz="2000">
+                    <a:solidFill>
+                      <a:srgbClr val="1E293B"/>
+                    </a:solidFill>
+                    <a:latin typeface="Calibri"/>
+                  </a:rPr>
+                  <a:t> Gọi </a:t>
+                </a:r>
+                <a:r>
+                  <a:rPr lang="vi-VN"/>
+                  <a:t>O</a:t>
+                </a:r>
+                <a:r>
+                  <a:rPr sz="2000">
+                    <a:solidFill>
+                      <a:srgbClr val="1E293B"/>
+                    </a:solidFill>
+                    <a:latin typeface="Calibri"/>
+                  </a:rPr>
+                  <a:t> là giao điểm hai đường chéo (trung điểm </a:t>
+                </a:r>
+                <a:r>
+                  <a:rPr lang="vi-VN"/>
+                  <a:t>AC</a:t>
+                </a:r>
+                <a:r>
+                  <a:rPr sz="2000">
+                    <a:solidFill>
+                      <a:srgbClr val="1E293B"/>
+                    </a:solidFill>
+                    <a:latin typeface="Calibri"/>
+                  </a:rPr>
+                  <a:t> và </a:t>
+                </a:r>
+                <a:r>
+                  <a:rPr lang="vi-VN"/>
+                  <a:t>BD</a:t>
+                </a:r>
+                <a:r>
+                  <a:rPr sz="2000">
+                    <a:solidFill>
+                      <a:srgbClr val="1E293B"/>
+                    </a:solidFill>
+                    <a:latin typeface="Calibri"/>
+                  </a:rPr>
+                  <a:t>): </a:t>
+                </a:r>
+                <a:r>
+                  <a:rPr lang="vi-VN"/>
+                  <a:t>\overrightarrow{SA}</a:t>
+                </a:r>
+                <a:r>
+                  <a:rPr sz="2000">
+                    <a:solidFill>
+                      <a:srgbClr val="1E293B"/>
+                    </a:solidFill>
+                    <a:latin typeface="Calibri"/>
+                  </a:rPr>
+                  <a:t> + </a:t>
+                </a:r>
+                <a:r>
+                  <a:rPr lang="vi-VN"/>
+                  <a:t>\overrightarrow{SC}</a:t>
+                </a:r>
+                <a:r>
+                  <a:rPr sz="2000">
+                    <a:solidFill>
+                      <a:srgbClr val="1E293B"/>
+                    </a:solidFill>
+                    <a:latin typeface="Calibri"/>
+                  </a:rPr>
+                  <a:t> = </a:t>
+                </a:r>
+                <a:r>
+                  <a:rPr lang="vi-VN"/>
+                  <a:t>2</a:t>
+                </a:r>
+                <a:r>
+                  <a:rPr sz="2000">
+                    <a:solidFill>
+                      <a:srgbClr val="1E293B"/>
+                    </a:solidFill>
+                    <a:latin typeface="Calibri"/>
+                  </a:rPr>
+                  <a:t> </a:t>
+                </a:r>
+                <a:r>
+                  <a:rPr lang="vi-VN"/>
+                  <a:t>\overrightarrow{SO}</a:t>
+                </a:r>
+                <a:r>
+                  <a:rPr sz="2000">
+                    <a:solidFill>
+                      <a:srgbClr val="1E293B"/>
+                    </a:solidFill>
+                    <a:latin typeface="Calibri"/>
+                  </a:rPr>
+                  <a:t> = </a:t>
+                </a:r>
+                <a:r>
+                  <a:rPr lang="vi-VN"/>
+                  <a:t>\overrightarrow{SB}</a:t>
+                </a:r>
+                <a:r>
+                  <a:rPr sz="2000">
+                    <a:solidFill>
+                      <a:srgbClr val="1E293B"/>
+                    </a:solidFill>
+                    <a:latin typeface="Calibri"/>
+                  </a:rPr>
+                  <a:t> + </a:t>
+                </a:r>
+                <a:r>
+                  <a:rPr lang="vi-VN"/>
+                  <a:t>\overrightarrow{SD}</a:t>
+                </a:r>
+                <a:r>
+                  <a:rPr sz="2000">
+                    <a:solidFill>
+                      <a:srgbClr val="1E293B"/>
+                    </a:solidFill>
+                    <a:latin typeface="Calibri"/>
+                  </a:rPr>
+                  <a:t>.</a:t>
+                </a:r>
+              </a:p>
+            </p:txBody>
+          </p:sp>
+        </mc:Fallback>
+      </mc:AlternateContent>
+      <mc:AlternateContent xmlns:mc="http://schemas.openxmlformats.org/markup-compatibility/2006">
+        <mc:Choice xmlns:a14="http://schemas.microsoft.com/office/drawing/2010/main" Requires="a14">
+          <p:sp>
+            <p:nvSpPr>
+              <p:cNvPr id="10" name="s2_chu"/>
+              <p:cNvSpPr txBox="1"/>
+              <p:nvPr/>
+            </p:nvSpPr>
+            <p:spPr>
+              <a:xfrm>
+                <a:off x="548640" y="3157728"/>
+                <a:ext cx="11064240" cy="783335"/>
+              </a:xfrm>
+              <a:prstGeom prst="rect">
+                <a:avLst/>
+              </a:prstGeom>
+              <a:noFill/>
+            </p:spPr>
+            <p:txBody>
+              <a:bodyPr wrap="square" anchor="t" lIns="45720" rIns="45720">
+                <a:spAutoFit/>
+              </a:bodyPr>
+              <a:lstStyle/>
               <a:p>
                 <a:pPr algn="l">
                   <a:spcAft>
@@ -21091,14 +21746,14 @@
         <mc:Fallback>
           <p:sp>
             <p:nvSpPr>
-              <p:cNvPr id="7" name="TextBox 6"/>
+              <p:cNvPr id="10" name="TextBox 9"/>
               <p:cNvSpPr txBox="1"/>
               <p:nvPr/>
             </p:nvSpPr>
             <p:spPr>
               <a:xfrm>
-                <a:off x="548640" y="1371600"/>
-                <a:ext cx="11064240" cy="1493520"/>
+                <a:off x="548640" y="3157728"/>
+                <a:ext cx="11064240" cy="783335"/>
               </a:xfrm>
               <a:prstGeom prst="rect">
                 <a:avLst/>
@@ -21123,109 +21778,6 @@
                     </a:solidFill>
                     <a:latin typeface="Calibri"/>
                   </a:rPr>
-                  <a:t>2.35.</a:t>
-                </a:r>
-                <a:r>
-                  <a:rPr sz="2000">
-                    <a:solidFill>
-                      <a:srgbClr val="1E293B"/>
-                    </a:solidFill>
-                    <a:latin typeface="Calibri"/>
-                  </a:rPr>
-                  <a:t> Cho hình chóp </a:t>
-                </a:r>
-                <a:r>
-                  <a:rPr lang="vi-VN"/>
-                  <a:t>S.ABCD</a:t>
-                </a:r>
-                <a:r>
-                  <a:rPr sz="2000">
-                    <a:solidFill>
-                      <a:srgbClr val="1E293B"/>
-                    </a:solidFill>
-                    <a:latin typeface="Calibri"/>
-                  </a:rPr>
-                  <a:t> có đáy </a:t>
-                </a:r>
-                <a:r>
-                  <a:rPr lang="vi-VN"/>
-                  <a:t>ABCD</a:t>
-                </a:r>
-                <a:r>
-                  <a:rPr sz="2000">
-                    <a:solidFill>
-                      <a:srgbClr val="1E293B"/>
-                    </a:solidFill>
-                    <a:latin typeface="Calibri"/>
-                  </a:rPr>
-                  <a:t> là hình chữ nhật. Chứng minh rằng </a:t>
-                </a:r>
-                <a:r>
-                  <a:rPr lang="vi-VN"/>
-                  <a:t>\overrightarrow{SA}</a:t>
-                </a:r>
-                <a:r>
-                  <a:rPr sz="2000">
-                    <a:solidFill>
-                      <a:srgbClr val="1E293B"/>
-                    </a:solidFill>
-                    <a:latin typeface="Calibri"/>
-                  </a:rPr>
-                  <a:t> + </a:t>
-                </a:r>
-                <a:r>
-                  <a:rPr lang="vi-VN"/>
-                  <a:t>\overrightarrow{SC}</a:t>
-                </a:r>
-                <a:r>
-                  <a:rPr sz="2000">
-                    <a:solidFill>
-                      <a:srgbClr val="1E293B"/>
-                    </a:solidFill>
-                    <a:latin typeface="Calibri"/>
-                  </a:rPr>
-                  <a:t> = </a:t>
-                </a:r>
-                <a:r>
-                  <a:rPr lang="vi-VN"/>
-                  <a:t>\overrightarrow{SB}</a:t>
-                </a:r>
-                <a:r>
-                  <a:rPr sz="2000">
-                    <a:solidFill>
-                      <a:srgbClr val="1E293B"/>
-                    </a:solidFill>
-                    <a:latin typeface="Calibri"/>
-                  </a:rPr>
-                  <a:t> + </a:t>
-                </a:r>
-                <a:r>
-                  <a:rPr lang="vi-VN"/>
-                  <a:t>\overrightarrow{SD}</a:t>
-                </a:r>
-                <a:r>
-                  <a:rPr sz="2000">
-                    <a:solidFill>
-                      <a:srgbClr val="1E293B"/>
-                    </a:solidFill>
-                    <a:latin typeface="Calibri"/>
-                  </a:rPr>
-                  <a:t>.</a:t>
-                </a:r>
-              </a:p>
-              <a:p>
-                <a:pPr algn="l">
-                  <a:spcAft>
-                    <a:spcPts val="800"/>
-                  </a:spcAft>
-                </a:pPr>
-                <a:r>
-                  <a:rPr sz="2000" b="1">
-                    <a:solidFill>
-                      <a:srgbClr val="1E293B"/>
-                    </a:solidFill>
-                    <a:latin typeface="Calibri"/>
-                  </a:rPr>
                   <a:t>2.36.</a:t>
                 </a:r>
                 <a:r>
@@ -21400,513 +21952,13 @@
       </mc:AlternateContent>
       <p:sp>
         <p:nvSpPr>
-          <p:cNvPr id="8" name="s1_nen"/>
+          <p:cNvPr id="11" name="s3_nen"/>
           <p:cNvSpPr/>
           <p:nvPr/>
         </p:nvSpPr>
         <p:spPr>
           <a:xfrm>
-            <a:off x="548640" y="3002280"/>
-            <a:ext cx="11064240" cy="874775"/>
-          </a:xfrm>
-          <a:prstGeom prst="roundRect">
-            <a:avLst>
-              <a:gd name="adj" fmla="val 6000"/>
-            </a:avLst>
-          </a:prstGeom>
-          <a:solidFill>
-            <a:srgbClr val="ECFDF3"/>
-          </a:solidFill>
-          <a:ln w="19050">
-            <a:solidFill>
-              <a:srgbClr val="166534"/>
-            </a:solidFill>
-          </a:ln>
-          <a:effectLst/>
-        </p:spPr>
-        <p:style>
-          <a:lnRef idx="1">
-            <a:schemeClr val="accent1"/>
-          </a:lnRef>
-          <a:fillRef idx="3">
-            <a:schemeClr val="accent1"/>
-          </a:fillRef>
-          <a:effectRef idx="2">
-            <a:schemeClr val="accent1"/>
-          </a:effectRef>
-          <a:fontRef idx="minor">
-            <a:schemeClr val="lt1"/>
-          </a:fontRef>
-        </p:style>
-        <p:txBody>
-          <a:bodyPr rtlCol="0" anchor="ctr"/>
-          <a:lstStyle/>
-          <a:p>
-            <a:pPr algn="ctr"/>
-          </a:p>
-        </p:txBody>
-      </p:sp>
-      <mc:AlternateContent xmlns:mc="http://schemas.openxmlformats.org/markup-compatibility/2006">
-        <mc:Choice xmlns:a14="http://schemas.microsoft.com/office/drawing/2010/main" Requires="a14">
-          <p:sp>
-            <p:nvSpPr>
-              <p:cNvPr id="9" name="s1_chu"/>
-              <p:cNvSpPr txBox="1"/>
-              <p:nvPr/>
-            </p:nvSpPr>
-            <p:spPr>
-              <a:xfrm>
-                <a:off x="713232" y="3038856"/>
-                <a:ext cx="10735056" cy="801623"/>
-              </a:xfrm>
-              <a:prstGeom prst="rect">
-                <a:avLst/>
-              </a:prstGeom>
-              <a:noFill/>
-            </p:spPr>
-            <p:txBody>
-              <a:bodyPr wrap="square" anchor="ctr" lIns="45720" rIns="45720">
-                <a:spAutoFit/>
-              </a:bodyPr>
-              <a:lstStyle/>
-              <a:p>
-                <a:pPr algn="l">
-                  <a:spcAft>
-                    <a:spcPts val="800"/>
-                  </a:spcAft>
-                </a:pPr>
-                <a:r>
-                  <a:rPr sz="2000" b="1">
-                    <a:solidFill>
-                      <a:srgbClr val="1E293B"/>
-                    </a:solidFill>
-                    <a:latin typeface="Calibri"/>
-                  </a:rPr>
-                  <a:t>2.35.</a:t>
-                </a:r>
-                <a:r>
-                  <a:rPr sz="2000">
-                    <a:solidFill>
-                      <a:srgbClr val="1E293B"/>
-                    </a:solidFill>
-                    <a:latin typeface="Calibri"/>
-                  </a:rPr>
-                  <a:t> Gọi </a:t>
-                </a:r>
-                <a14:m>
-                  <m:oMath xmlns:m="http://schemas.openxmlformats.org/officeDocument/2006/math">
-                    <m:r>
-                      <a:rPr lang="vi-VN" sz="2000" b="0">
-                        <a:solidFill>
-                          <a:srgbClr val="1E293B"/>
-                        </a:solidFill>
-                        <a:latin typeface="Cambria Math" panose="02040503050406030204" pitchFamily="18" charset="0"/>
-                      </a:rPr>
-                      <m:t>O</m:t>
-                    </m:r>
-                  </m:oMath>
-                </a14:m>
-                <a:r>
-                  <a:rPr sz="2000">
-                    <a:solidFill>
-                      <a:srgbClr val="1E293B"/>
-                    </a:solidFill>
-                    <a:latin typeface="Calibri"/>
-                  </a:rPr>
-                  <a:t> là giao điểm hai đường chéo (trung điểm </a:t>
-                </a:r>
-                <a14:m>
-                  <m:oMath xmlns:m="http://schemas.openxmlformats.org/officeDocument/2006/math">
-                    <m:r>
-                      <a:rPr lang="vi-VN" sz="2000" b="0">
-                        <a:solidFill>
-                          <a:srgbClr val="1E293B"/>
-                        </a:solidFill>
-                        <a:latin typeface="Cambria Math" panose="02040503050406030204" pitchFamily="18" charset="0"/>
-                      </a:rPr>
-                      <m:t>AC</m:t>
-                    </m:r>
-                  </m:oMath>
-                </a14:m>
-                <a:r>
-                  <a:rPr sz="2000">
-                    <a:solidFill>
-                      <a:srgbClr val="1E293B"/>
-                    </a:solidFill>
-                    <a:latin typeface="Calibri"/>
-                  </a:rPr>
-                  <a:t> và </a:t>
-                </a:r>
-                <a14:m>
-                  <m:oMath xmlns:m="http://schemas.openxmlformats.org/officeDocument/2006/math">
-                    <m:r>
-                      <a:rPr lang="vi-VN" sz="2000" b="0">
-                        <a:solidFill>
-                          <a:srgbClr val="1E293B"/>
-                        </a:solidFill>
-                        <a:latin typeface="Cambria Math" panose="02040503050406030204" pitchFamily="18" charset="0"/>
-                      </a:rPr>
-                      <m:t>BD</m:t>
-                    </m:r>
-                  </m:oMath>
-                </a14:m>
-                <a:r>
-                  <a:rPr sz="2000">
-                    <a:solidFill>
-                      <a:srgbClr val="1E293B"/>
-                    </a:solidFill>
-                    <a:latin typeface="Calibri"/>
-                  </a:rPr>
-                  <a:t>): </a:t>
-                </a:r>
-                <a14:m>
-                  <m:oMath xmlns:m="http://schemas.openxmlformats.org/officeDocument/2006/math">
-                    <m:acc>
-                      <m:accPr>
-                        <m:chr m:val="⃗"/>
-                      </m:accPr>
-                      <m:e>
-                        <m:r>
-                          <a:rPr lang="vi-VN" sz="2000" b="0">
-                            <a:solidFill>
-                              <a:srgbClr val="1E293B"/>
-                            </a:solidFill>
-                            <a:latin typeface="Cambria Math" panose="02040503050406030204" pitchFamily="18" charset="0"/>
-                          </a:rPr>
-                          <m:t>SA</m:t>
-                        </m:r>
-                      </m:e>
-                    </m:acc>
-                  </m:oMath>
-                </a14:m>
-                <a:r>
-                  <a:rPr sz="2000">
-                    <a:solidFill>
-                      <a:srgbClr val="1E293B"/>
-                    </a:solidFill>
-                    <a:latin typeface="Calibri"/>
-                  </a:rPr>
-                  <a:t> + </a:t>
-                </a:r>
-                <a14:m>
-                  <m:oMath xmlns:m="http://schemas.openxmlformats.org/officeDocument/2006/math">
-                    <m:acc>
-                      <m:accPr>
-                        <m:chr m:val="⃗"/>
-                      </m:accPr>
-                      <m:e>
-                        <m:r>
-                          <a:rPr lang="vi-VN" sz="2000" b="0">
-                            <a:solidFill>
-                              <a:srgbClr val="1E293B"/>
-                            </a:solidFill>
-                            <a:latin typeface="Cambria Math" panose="02040503050406030204" pitchFamily="18" charset="0"/>
-                          </a:rPr>
-                          <m:t>SC</m:t>
-                        </m:r>
-                      </m:e>
-                    </m:acc>
-                  </m:oMath>
-                </a14:m>
-                <a:r>
-                  <a:rPr sz="2000">
-                    <a:solidFill>
-                      <a:srgbClr val="1E293B"/>
-                    </a:solidFill>
-                    <a:latin typeface="Calibri"/>
-                  </a:rPr>
-                  <a:t> = </a:t>
-                </a:r>
-                <a14:m>
-                  <m:oMath xmlns:m="http://schemas.openxmlformats.org/officeDocument/2006/math">
-                    <m:r>
-                      <a:rPr lang="vi-VN" sz="2000" b="0">
-                        <a:solidFill>
-                          <a:srgbClr val="1E293B"/>
-                        </a:solidFill>
-                        <a:latin typeface="Cambria Math" panose="02040503050406030204" pitchFamily="18" charset="0"/>
-                      </a:rPr>
-                      <m:t>2</m:t>
-                    </m:r>
-                  </m:oMath>
-                </a14:m>
-                <a:r>
-                  <a:rPr sz="2000">
-                    <a:solidFill>
-                      <a:srgbClr val="1E293B"/>
-                    </a:solidFill>
-                    <a:latin typeface="Calibri"/>
-                  </a:rPr>
-                  <a:t> </a:t>
-                </a:r>
-                <a14:m>
-                  <m:oMath xmlns:m="http://schemas.openxmlformats.org/officeDocument/2006/math">
-                    <m:acc>
-                      <m:accPr>
-                        <m:chr m:val="⃗"/>
-                      </m:accPr>
-                      <m:e>
-                        <m:r>
-                          <a:rPr lang="vi-VN" sz="2000" b="0">
-                            <a:solidFill>
-                              <a:srgbClr val="1E293B"/>
-                            </a:solidFill>
-                            <a:latin typeface="Cambria Math" panose="02040503050406030204" pitchFamily="18" charset="0"/>
-                          </a:rPr>
-                          <m:t>SO</m:t>
-                        </m:r>
-                      </m:e>
-                    </m:acc>
-                  </m:oMath>
-                </a14:m>
-                <a:r>
-                  <a:rPr sz="2000">
-                    <a:solidFill>
-                      <a:srgbClr val="1E293B"/>
-                    </a:solidFill>
-                    <a:latin typeface="Calibri"/>
-                  </a:rPr>
-                  <a:t> = </a:t>
-                </a:r>
-                <a14:m>
-                  <m:oMath xmlns:m="http://schemas.openxmlformats.org/officeDocument/2006/math">
-                    <m:acc>
-                      <m:accPr>
-                        <m:chr m:val="⃗"/>
-                      </m:accPr>
-                      <m:e>
-                        <m:r>
-                          <a:rPr lang="vi-VN" sz="2000" b="0">
-                            <a:solidFill>
-                              <a:srgbClr val="1E293B"/>
-                            </a:solidFill>
-                            <a:latin typeface="Cambria Math" panose="02040503050406030204" pitchFamily="18" charset="0"/>
-                          </a:rPr>
-                          <m:t>SB</m:t>
-                        </m:r>
-                      </m:e>
-                    </m:acc>
-                  </m:oMath>
-                </a14:m>
-                <a:r>
-                  <a:rPr sz="2000">
-                    <a:solidFill>
-                      <a:srgbClr val="1E293B"/>
-                    </a:solidFill>
-                    <a:latin typeface="Calibri"/>
-                  </a:rPr>
-                  <a:t> + </a:t>
-                </a:r>
-                <a14:m>
-                  <m:oMath xmlns:m="http://schemas.openxmlformats.org/officeDocument/2006/math">
-                    <m:acc>
-                      <m:accPr>
-                        <m:chr m:val="⃗"/>
-                      </m:accPr>
-                      <m:e>
-                        <m:r>
-                          <a:rPr lang="vi-VN" sz="2000" b="0">
-                            <a:solidFill>
-                              <a:srgbClr val="1E293B"/>
-                            </a:solidFill>
-                            <a:latin typeface="Cambria Math" panose="02040503050406030204" pitchFamily="18" charset="0"/>
-                          </a:rPr>
-                          <m:t>SD</m:t>
-                        </m:r>
-                      </m:e>
-                    </m:acc>
-                  </m:oMath>
-                </a14:m>
-                <a:r>
-                  <a:rPr sz="2000">
-                    <a:solidFill>
-                      <a:srgbClr val="1E293B"/>
-                    </a:solidFill>
-                    <a:latin typeface="Calibri"/>
-                  </a:rPr>
-                  <a:t>.</a:t>
-                </a:r>
-              </a:p>
-            </p:txBody>
-          </p:sp>
-        </mc:Choice>
-        <mc:Fallback>
-          <p:sp>
-            <p:nvSpPr>
-              <p:cNvPr id="9" name="TextBox 8"/>
-              <p:cNvSpPr txBox="1"/>
-              <p:nvPr/>
-            </p:nvSpPr>
-            <p:spPr>
-              <a:xfrm>
-                <a:off x="713232" y="3038856"/>
-                <a:ext cx="10735056" cy="801623"/>
-              </a:xfrm>
-              <a:prstGeom prst="rect">
-                <a:avLst/>
-              </a:prstGeom>
-              <a:noFill/>
-            </p:spPr>
-            <p:txBody>
-              <a:bodyPr wrap="square" anchor="ctr" lIns="45720" rIns="45720">
-                <a:spAutoFit/>
-              </a:bodyPr>
-              <a:lstStyle/>
-              <a:p>
-                <a:pPr algn="l">
-                  <a:spcAft>
-                    <a:spcPts val="800"/>
-                  </a:spcAft>
-                </a:pPr>
-                <a:r>
-                  <a:rPr sz="2000" b="1">
-                    <a:solidFill>
-                      <a:srgbClr val="1E293B"/>
-                    </a:solidFill>
-                    <a:latin typeface="Calibri"/>
-                  </a:rPr>
-                  <a:t>2.35.</a:t>
-                </a:r>
-                <a:r>
-                  <a:rPr sz="2000">
-                    <a:solidFill>
-                      <a:srgbClr val="1E293B"/>
-                    </a:solidFill>
-                    <a:latin typeface="Calibri"/>
-                  </a:rPr>
-                  <a:t> Gọi </a:t>
-                </a:r>
-                <a:r>
-                  <a:rPr lang="vi-VN"/>
-                  <a:t>O</a:t>
-                </a:r>
-                <a:r>
-                  <a:rPr sz="2000">
-                    <a:solidFill>
-                      <a:srgbClr val="1E293B"/>
-                    </a:solidFill>
-                    <a:latin typeface="Calibri"/>
-                  </a:rPr>
-                  <a:t> là giao điểm hai đường chéo (trung điểm </a:t>
-                </a:r>
-                <a:r>
-                  <a:rPr lang="vi-VN"/>
-                  <a:t>AC</a:t>
-                </a:r>
-                <a:r>
-                  <a:rPr sz="2000">
-                    <a:solidFill>
-                      <a:srgbClr val="1E293B"/>
-                    </a:solidFill>
-                    <a:latin typeface="Calibri"/>
-                  </a:rPr>
-                  <a:t> và </a:t>
-                </a:r>
-                <a:r>
-                  <a:rPr lang="vi-VN"/>
-                  <a:t>BD</a:t>
-                </a:r>
-                <a:r>
-                  <a:rPr sz="2000">
-                    <a:solidFill>
-                      <a:srgbClr val="1E293B"/>
-                    </a:solidFill>
-                    <a:latin typeface="Calibri"/>
-                  </a:rPr>
-                  <a:t>): </a:t>
-                </a:r>
-                <a:r>
-                  <a:rPr lang="vi-VN"/>
-                  <a:t>\overrightarrow{SA}</a:t>
-                </a:r>
-                <a:r>
-                  <a:rPr sz="2000">
-                    <a:solidFill>
-                      <a:srgbClr val="1E293B"/>
-                    </a:solidFill>
-                    <a:latin typeface="Calibri"/>
-                  </a:rPr>
-                  <a:t> + </a:t>
-                </a:r>
-                <a:r>
-                  <a:rPr lang="vi-VN"/>
-                  <a:t>\overrightarrow{SC}</a:t>
-                </a:r>
-                <a:r>
-                  <a:rPr sz="2000">
-                    <a:solidFill>
-                      <a:srgbClr val="1E293B"/>
-                    </a:solidFill>
-                    <a:latin typeface="Calibri"/>
-                  </a:rPr>
-                  <a:t> = </a:t>
-                </a:r>
-                <a:r>
-                  <a:rPr lang="vi-VN"/>
-                  <a:t>2</a:t>
-                </a:r>
-                <a:r>
-                  <a:rPr sz="2000">
-                    <a:solidFill>
-                      <a:srgbClr val="1E293B"/>
-                    </a:solidFill>
-                    <a:latin typeface="Calibri"/>
-                  </a:rPr>
-                  <a:t> </a:t>
-                </a:r>
-                <a:r>
-                  <a:rPr lang="vi-VN"/>
-                  <a:t>\overrightarrow{SO}</a:t>
-                </a:r>
-                <a:r>
-                  <a:rPr sz="2000">
-                    <a:solidFill>
-                      <a:srgbClr val="1E293B"/>
-                    </a:solidFill>
-                    <a:latin typeface="Calibri"/>
-                  </a:rPr>
-                  <a:t> = </a:t>
-                </a:r>
-                <a:r>
-                  <a:rPr lang="vi-VN"/>
-                  <a:t>\overrightarrow{SB}</a:t>
-                </a:r>
-                <a:r>
-                  <a:rPr sz="2000">
-                    <a:solidFill>
-                      <a:srgbClr val="1E293B"/>
-                    </a:solidFill>
-                    <a:latin typeface="Calibri"/>
-                  </a:rPr>
-                  <a:t> + </a:t>
-                </a:r>
-                <a:r>
-                  <a:rPr lang="vi-VN"/>
-                  <a:t>\overrightarrow{SD}</a:t>
-                </a:r>
-                <a:r>
-                  <a:rPr sz="2000">
-                    <a:solidFill>
-                      <a:srgbClr val="1E293B"/>
-                    </a:solidFill>
-                    <a:latin typeface="Calibri"/>
-                  </a:rPr>
-                  <a:t>.</a:t>
-                </a:r>
-              </a:p>
-            </p:txBody>
-          </p:sp>
-        </mc:Fallback>
-      </mc:AlternateContent>
-      <p:sp>
-        <p:nvSpPr>
-          <p:cNvPr id="10" name="s2_nen"/>
-          <p:cNvSpPr/>
-          <p:nvPr/>
-        </p:nvSpPr>
-        <p:spPr>
-          <a:xfrm>
-            <a:off x="548640" y="3968496"/>
+            <a:off x="548640" y="4005072"/>
             <a:ext cx="11064240" cy="1453896"/>
           </a:xfrm>
           <a:prstGeom prst="roundRect">
@@ -21950,13 +22002,13 @@
         <mc:Choice xmlns:a14="http://schemas.microsoft.com/office/drawing/2010/main" Requires="a14">
           <p:sp>
             <p:nvSpPr>
-              <p:cNvPr id="11" name="s2_chu"/>
+              <p:cNvPr id="12" name="s3_chu"/>
               <p:cNvSpPr txBox="1"/>
               <p:nvPr/>
             </p:nvSpPr>
             <p:spPr>
               <a:xfrm>
-                <a:off x="713232" y="4005072"/>
+                <a:off x="713232" y="4041648"/>
                 <a:ext cx="10735056" cy="1380744"/>
               </a:xfrm>
               <a:prstGeom prst="rect">
@@ -22730,13 +22782,13 @@
         <mc:Fallback>
           <p:sp>
             <p:nvSpPr>
-              <p:cNvPr id="11" name="TextBox 10"/>
+              <p:cNvPr id="12" name="TextBox 11"/>
               <p:cNvSpPr txBox="1"/>
               <p:nvPr/>
             </p:nvSpPr>
             <p:spPr>
               <a:xfrm>
-                <a:off x="713232" y="4005072"/>
+                <a:off x="713232" y="4041648"/>
                 <a:ext cx="10735056" cy="1380744"/>
               </a:xfrm>
               <a:prstGeom prst="rect">
@@ -23222,21 +23274,66 @@
                                   </p:childTnLst>
                                 </p:cTn>
                               </p:par>
+                            </p:childTnLst>
+                          </p:cTn>
+                        </p:par>
+                      </p:childTnLst>
+                    </p:cTn>
+                  </p:par>
+                  <p:par>
+                    <p:cTn id="13" fill="hold">
+                      <p:stCondLst>
+                        <p:cond delay="indefinite"/>
+                      </p:stCondLst>
+                      <p:childTnLst>
+                        <p:par>
+                          <p:cTn id="14" fill="hold">
+                            <p:stCondLst>
+                              <p:cond delay="0"/>
+                            </p:stCondLst>
+                            <p:childTnLst>
                               <p:par>
-                                <p:cTn id="13" presetID="1" presetClass="entr" presetSubtype="0" fill="hold" nodeType="withEffect">
+                                <p:cTn id="15" presetID="1" presetClass="entr" presetSubtype="0" fill="hold" nodeType="clickEffect">
                                   <p:stCondLst>
                                     <p:cond delay="0"/>
                                   </p:stCondLst>
                                   <p:childTnLst>
                                     <p:set>
                                       <p:cBhvr>
-                                        <p:cTn id="14" dur="1" fill="hold">
+                                        <p:cTn id="16" dur="1" fill="hold">
                                           <p:stCondLst>
                                             <p:cond delay="0"/>
                                           </p:stCondLst>
                                         </p:cTn>
                                         <p:tgtEl>
                                           <p:spTgt spid="11"/>
+                                        </p:tgtEl>
+                                        <p:attrNameLst>
+                                          <p:attrName>style.visibility</p:attrName>
+                                        </p:attrNameLst>
+                                      </p:cBhvr>
+                                      <p:to>
+                                        <p:strVal val="visible"/>
+                                      </p:to>
+                                    </p:set>
+                                  </p:childTnLst>
+                                </p:cTn>
+                              </p:par>
+                              <p:par>
+                                <p:cTn id="17" presetID="1" presetClass="entr" presetSubtype="0" fill="hold" nodeType="withEffect">
+                                  <p:stCondLst>
+                                    <p:cond delay="0"/>
+                                  </p:stCondLst>
+                                  <p:childTnLst>
+                                    <p:set>
+                                      <p:cBhvr>
+                                        <p:cTn id="18" dur="1" fill="hold">
+                                          <p:stCondLst>
+                                            <p:cond delay="0"/>
+                                          </p:stCondLst>
+                                        </p:cTn>
+                                        <p:tgtEl>
+                                          <p:spTgt spid="12"/>
                                         </p:tgtEl>
                                         <p:attrNameLst>
                                           <p:attrName>style.visibility</p:attrName>
@@ -24141,7 +24238,7 @@
         </p:nvSpPr>
         <p:spPr>
           <a:xfrm>
-            <a:off x="548640" y="2596896"/>
+            <a:off x="548640" y="2523744"/>
             <a:ext cx="11064240" cy="707135"/>
           </a:xfrm>
           <a:prstGeom prst="roundRect">
@@ -24191,7 +24288,7 @@
             </p:nvSpPr>
             <p:spPr>
               <a:xfrm>
-                <a:off x="713232" y="2633472"/>
+                <a:off x="713232" y="2560320"/>
                 <a:ext cx="10735056" cy="633983"/>
               </a:xfrm>
               <a:prstGeom prst="rect">
@@ -24480,7 +24577,7 @@
             </p:nvSpPr>
             <p:spPr>
               <a:xfrm>
-                <a:off x="713232" y="2633472"/>
+                <a:off x="713232" y="2560320"/>
                 <a:ext cx="10735056" cy="633983"/>
               </a:xfrm>
               <a:prstGeom prst="rect">
@@ -24612,7 +24709,7 @@
         </p:nvSpPr>
         <p:spPr>
           <a:xfrm>
-            <a:off x="548640" y="3395472"/>
+            <a:off x="548640" y="3294887"/>
             <a:ext cx="11064240" cy="1011936"/>
           </a:xfrm>
           <a:prstGeom prst="roundRect">
@@ -24662,7 +24759,7 @@
             </p:nvSpPr>
             <p:spPr>
               <a:xfrm>
-                <a:off x="713232" y="3432048"/>
+                <a:off x="713232" y="3331464"/>
                 <a:ext cx="10735056" cy="938784"/>
               </a:xfrm>
               <a:prstGeom prst="rect">
@@ -25079,7 +25176,7 @@
             </p:nvSpPr>
             <p:spPr>
               <a:xfrm>
-                <a:off x="713232" y="3432048"/>
+                <a:off x="713232" y="3331464"/>
                 <a:ext cx="10735056" cy="938784"/>
               </a:xfrm>
               <a:prstGeom prst="rect">
@@ -29302,7 +29399,7 @@
             <p:spPr>
               <a:xfrm>
                 <a:off x="548640" y="1371600"/>
-                <a:ext cx="11064240" cy="1493520"/>
+                <a:ext cx="11064240" cy="783335"/>
               </a:xfrm>
               <a:prstGeom prst="rect">
                 <a:avLst/>
@@ -29515,239 +29612,6 @@
                   <a:t>.</a:t>
                 </a:r>
               </a:p>
-              <a:p>
-                <a:pPr algn="l">
-                  <a:spcAft>
-                    <a:spcPts val="800"/>
-                  </a:spcAft>
-                </a:pPr>
-                <a:r>
-                  <a:rPr sz="2000" b="1">
-                    <a:solidFill>
-                      <a:srgbClr val="1E293B"/>
-                    </a:solidFill>
-                    <a:latin typeface="Calibri"/>
-                  </a:rPr>
-                  <a:t>2.39.</a:t>
-                </a:r>
-                <a:r>
-                  <a:rPr sz="2000">
-                    <a:solidFill>
-                      <a:srgbClr val="1E293B"/>
-                    </a:solidFill>
-                    <a:latin typeface="Calibri"/>
-                  </a:rPr>
-                  <a:t> Cho hình hộp </a:t>
-                </a:r>
-                <a14:m>
-                  <m:oMath xmlns:m="http://schemas.openxmlformats.org/officeDocument/2006/math">
-                    <m:r>
-                      <a:rPr lang="vi-VN" sz="2000" b="0">
-                        <a:solidFill>
-                          <a:srgbClr val="1E293B"/>
-                        </a:solidFill>
-                        <a:latin typeface="Cambria Math" panose="02040503050406030204" pitchFamily="18" charset="0"/>
-                      </a:rPr>
-                      <m:t>OABC.</m:t>
-                    </m:r>
-                    <m:sSup>
-                      <m:e>
-                        <m:r>
-                          <a:rPr lang="vi-VN" sz="2000" b="0">
-                            <a:solidFill>
-                              <a:srgbClr val="1E293B"/>
-                            </a:solidFill>
-                            <a:latin typeface="Cambria Math" panose="02040503050406030204" pitchFamily="18" charset="0"/>
-                          </a:rPr>
-                          <m:t>O</m:t>
-                        </m:r>
-                      </m:e>
-                      <m:sup>
-                        <m:r>
-                          <a:rPr lang="vi-VN" sz="2000" b="0">
-                            <a:solidFill>
-                              <a:srgbClr val="1E293B"/>
-                            </a:solidFill>
-                            <a:latin typeface="Cambria Math" panose="02040503050406030204" pitchFamily="18" charset="0"/>
-                          </a:rPr>
-                          <m:t>′</m:t>
-                        </m:r>
-                      </m:sup>
-                    </m:sSup>
-                    <m:sSup>
-                      <m:e>
-                        <m:r>
-                          <a:rPr lang="vi-VN" sz="2000" b="0">
-                            <a:solidFill>
-                              <a:srgbClr val="1E293B"/>
-                            </a:solidFill>
-                            <a:latin typeface="Cambria Math" panose="02040503050406030204" pitchFamily="18" charset="0"/>
-                          </a:rPr>
-                          <m:t>A</m:t>
-                        </m:r>
-                      </m:e>
-                      <m:sup>
-                        <m:r>
-                          <a:rPr lang="vi-VN" sz="2000" b="0">
-                            <a:solidFill>
-                              <a:srgbClr val="1E293B"/>
-                            </a:solidFill>
-                            <a:latin typeface="Cambria Math" panose="02040503050406030204" pitchFamily="18" charset="0"/>
-                          </a:rPr>
-                          <m:t>′</m:t>
-                        </m:r>
-                      </m:sup>
-                    </m:sSup>
-                    <m:sSup>
-                      <m:e>
-                        <m:r>
-                          <a:rPr lang="vi-VN" sz="2000" b="0">
-                            <a:solidFill>
-                              <a:srgbClr val="1E293B"/>
-                            </a:solidFill>
-                            <a:latin typeface="Cambria Math" panose="02040503050406030204" pitchFamily="18" charset="0"/>
-                          </a:rPr>
-                          <m:t>B</m:t>
-                        </m:r>
-                      </m:e>
-                      <m:sup>
-                        <m:r>
-                          <a:rPr lang="vi-VN" sz="2000" b="0">
-                            <a:solidFill>
-                              <a:srgbClr val="1E293B"/>
-                            </a:solidFill>
-                            <a:latin typeface="Cambria Math" panose="02040503050406030204" pitchFamily="18" charset="0"/>
-                          </a:rPr>
-                          <m:t>′</m:t>
-                        </m:r>
-                      </m:sup>
-                    </m:sSup>
-                    <m:sSup>
-                      <m:e>
-                        <m:r>
-                          <a:rPr lang="vi-VN" sz="2000" b="0">
-                            <a:solidFill>
-                              <a:srgbClr val="1E293B"/>
-                            </a:solidFill>
-                            <a:latin typeface="Cambria Math" panose="02040503050406030204" pitchFamily="18" charset="0"/>
-                          </a:rPr>
-                          <m:t>C</m:t>
-                        </m:r>
-                      </m:e>
-                      <m:sup>
-                        <m:r>
-                          <a:rPr lang="vi-VN" sz="2000" b="0">
-                            <a:solidFill>
-                              <a:srgbClr val="1E293B"/>
-                            </a:solidFill>
-                            <a:latin typeface="Cambria Math" panose="02040503050406030204" pitchFamily="18" charset="0"/>
-                          </a:rPr>
-                          <m:t>′</m:t>
-                        </m:r>
-                      </m:sup>
-                    </m:sSup>
-                  </m:oMath>
-                </a14:m>
-                <a:r>
-                  <a:rPr sz="2000">
-                    <a:solidFill>
-                      <a:srgbClr val="1E293B"/>
-                    </a:solidFill>
-                    <a:latin typeface="Calibri"/>
-                  </a:rPr>
-                  <a:t> có </a:t>
-                </a:r>
-                <a14:m>
-                  <m:oMath xmlns:m="http://schemas.openxmlformats.org/officeDocument/2006/math">
-                    <m:r>
-                      <a:rPr lang="vi-VN" sz="2000" b="0">
-                        <a:solidFill>
-                          <a:srgbClr val="1E293B"/>
-                        </a:solidFill>
-                        <a:latin typeface="Cambria Math" panose="02040503050406030204" pitchFamily="18" charset="0"/>
-                      </a:rPr>
-                      <m:t>A(2;3;1)</m:t>
-                    </m:r>
-                  </m:oMath>
-                </a14:m>
-                <a:r>
-                  <a:rPr sz="2000">
-                    <a:solidFill>
-                      <a:srgbClr val="1E293B"/>
-                    </a:solidFill>
-                    <a:latin typeface="Calibri"/>
-                  </a:rPr>
-                  <a:t>, </a:t>
-                </a:r>
-                <a14:m>
-                  <m:oMath xmlns:m="http://schemas.openxmlformats.org/officeDocument/2006/math">
-                    <m:r>
-                      <a:rPr lang="vi-VN" sz="2000" b="0">
-                        <a:solidFill>
-                          <a:srgbClr val="1E293B"/>
-                        </a:solidFill>
-                        <a:latin typeface="Cambria Math" panose="02040503050406030204" pitchFamily="18" charset="0"/>
-                      </a:rPr>
-                      <m:t>C(−1;2;3)</m:t>
-                    </m:r>
-                  </m:oMath>
-                </a14:m>
-                <a:r>
-                  <a:rPr sz="2000">
-                    <a:solidFill>
-                      <a:srgbClr val="1E293B"/>
-                    </a:solidFill>
-                    <a:latin typeface="Calibri"/>
-                  </a:rPr>
-                  <a:t> và </a:t>
-                </a:r>
-                <a14:m>
-                  <m:oMath xmlns:m="http://schemas.openxmlformats.org/officeDocument/2006/math">
-                    <m:sSup>
-                      <m:e>
-                        <m:r>
-                          <a:rPr lang="vi-VN" sz="2000" b="0">
-                            <a:solidFill>
-                              <a:srgbClr val="1E293B"/>
-                            </a:solidFill>
-                            <a:latin typeface="Cambria Math" panose="02040503050406030204" pitchFamily="18" charset="0"/>
-                          </a:rPr>
-                          <m:t>O</m:t>
-                        </m:r>
-                      </m:e>
-                      <m:sup>
-                        <m:r>
-                          <a:rPr lang="vi-VN" sz="2000" b="0">
-                            <a:solidFill>
-                              <a:srgbClr val="1E293B"/>
-                            </a:solidFill>
-                            <a:latin typeface="Cambria Math" panose="02040503050406030204" pitchFamily="18" charset="0"/>
-                          </a:rPr>
-                          <m:t>′</m:t>
-                        </m:r>
-                      </m:sup>
-                    </m:sSup>
-                    <m:r>
-                      <a:rPr lang="vi-VN" sz="2000" b="0">
-                        <a:solidFill>
-                          <a:srgbClr val="1E293B"/>
-                        </a:solidFill>
-                        <a:latin typeface="Cambria Math" panose="02040503050406030204" pitchFamily="18" charset="0"/>
-                      </a:rPr>
-                      <m:t>(1;−2;2)</m:t>
-                    </m:r>
-                  </m:oMath>
-                </a14:m>
-                <a:r>
-                  <a:rPr sz="2000">
-                    <a:solidFill>
-                      <a:srgbClr val="1E293B"/>
-                    </a:solidFill>
-                    <a:latin typeface="Calibri"/>
-                  </a:rPr>
-                  <a:t>. Tìm toạ độ các đỉnh còn lại của hình hộp.</a:t>
-                </a:r>
-              </a:p>
             </p:txBody>
           </p:sp>
         </mc:Choice>
@@ -29761,7 +29625,7 @@
             <p:spPr>
               <a:xfrm>
                 <a:off x="548640" y="1371600"/>
-                <a:ext cx="11064240" cy="1493520"/>
+                <a:ext cx="11064240" cy="783335"/>
               </a:xfrm>
               <a:prstGeom prst="rect">
                 <a:avLst/>
@@ -29902,83 +29766,6 @@
                   <a:t>.</a:t>
                 </a:r>
               </a:p>
-              <a:p>
-                <a:pPr algn="l">
-                  <a:spcAft>
-                    <a:spcPts val="800"/>
-                  </a:spcAft>
-                </a:pPr>
-                <a:r>
-                  <a:rPr sz="2000" b="1">
-                    <a:solidFill>
-                      <a:srgbClr val="1E293B"/>
-                    </a:solidFill>
-                    <a:latin typeface="Calibri"/>
-                  </a:rPr>
-                  <a:t>2.39.</a:t>
-                </a:r>
-                <a:r>
-                  <a:rPr sz="2000">
-                    <a:solidFill>
-                      <a:srgbClr val="1E293B"/>
-                    </a:solidFill>
-                    <a:latin typeface="Calibri"/>
-                  </a:rPr>
-                  <a:t> Cho hình hộp </a:t>
-                </a:r>
-                <a:r>
-                  <a:rPr lang="vi-VN"/>
-                  <a:t>OABC.O'A'B'C'</a:t>
-                </a:r>
-                <a:r>
-                  <a:rPr sz="2000">
-                    <a:solidFill>
-                      <a:srgbClr val="1E293B"/>
-                    </a:solidFill>
-                    <a:latin typeface="Calibri"/>
-                  </a:rPr>
-                  <a:t> có </a:t>
-                </a:r>
-                <a:r>
-                  <a:rPr lang="vi-VN"/>
-                  <a:t>A(2;3;1)</a:t>
-                </a:r>
-                <a:r>
-                  <a:rPr sz="2000">
-                    <a:solidFill>
-                      <a:srgbClr val="1E293B"/>
-                    </a:solidFill>
-                    <a:latin typeface="Calibri"/>
-                  </a:rPr>
-                  <a:t>, </a:t>
-                </a:r>
-                <a:r>
-                  <a:rPr lang="vi-VN"/>
-                  <a:t>C(-1;2;3)</a:t>
-                </a:r>
-                <a:r>
-                  <a:rPr sz="2000">
-                    <a:solidFill>
-                      <a:srgbClr val="1E293B"/>
-                    </a:solidFill>
-                    <a:latin typeface="Calibri"/>
-                  </a:rPr>
-                  <a:t> và </a:t>
-                </a:r>
-                <a:r>
-                  <a:rPr lang="vi-VN"/>
-                  <a:t>O'(1;-2;2)</a:t>
-                </a:r>
-                <a:r>
-                  <a:rPr sz="2000">
-                    <a:solidFill>
-                      <a:srgbClr val="1E293B"/>
-                    </a:solidFill>
-                    <a:latin typeface="Calibri"/>
-                  </a:rPr>
-                  <a:t>. Tìm toạ độ các đỉnh còn lại của hình hộp.</a:t>
-                </a:r>
-              </a:p>
             </p:txBody>
           </p:sp>
         </mc:Fallback>
@@ -29991,7 +29778,7 @@
         </p:nvSpPr>
         <p:spPr>
           <a:xfrm>
-            <a:off x="548640" y="3002280"/>
+            <a:off x="548640" y="2218944"/>
             <a:ext cx="11064240" cy="1149096"/>
           </a:xfrm>
           <a:prstGeom prst="roundRect">
@@ -30041,7 +29828,7 @@
             </p:nvSpPr>
             <p:spPr>
               <a:xfrm>
-                <a:off x="713232" y="3038856"/>
+                <a:off x="713232" y="2255520"/>
                 <a:ext cx="10735056" cy="1075944"/>
               </a:xfrm>
               <a:prstGeom prst="rect">
@@ -30548,7 +30335,7 @@
             </p:nvSpPr>
             <p:spPr>
               <a:xfrm>
-                <a:off x="713232" y="3038856"/>
+                <a:off x="713232" y="2255520"/>
                 <a:ext cx="10735056" cy="1075944"/>
               </a:xfrm>
               <a:prstGeom prst="rect">
@@ -30707,15 +30494,377 @@
           </p:sp>
         </mc:Fallback>
       </mc:AlternateContent>
+      <mc:AlternateContent xmlns:mc="http://schemas.openxmlformats.org/markup-compatibility/2006">
+        <mc:Choice xmlns:a14="http://schemas.microsoft.com/office/drawing/2010/main" Requires="a14">
+          <p:sp>
+            <p:nvSpPr>
+              <p:cNvPr id="10" name="s2_chu"/>
+              <p:cNvSpPr txBox="1"/>
+              <p:nvPr/>
+            </p:nvSpPr>
+            <p:spPr>
+              <a:xfrm>
+                <a:off x="548640" y="3432048"/>
+                <a:ext cx="11064240" cy="783335"/>
+              </a:xfrm>
+              <a:prstGeom prst="rect">
+                <a:avLst/>
+              </a:prstGeom>
+              <a:noFill/>
+            </p:spPr>
+            <p:txBody>
+              <a:bodyPr wrap="square" anchor="t" lIns="45720" rIns="45720">
+                <a:spAutoFit/>
+              </a:bodyPr>
+              <a:lstStyle/>
+              <a:p>
+                <a:pPr algn="l">
+                  <a:spcAft>
+                    <a:spcPts val="800"/>
+                  </a:spcAft>
+                </a:pPr>
+                <a:r>
+                  <a:rPr sz="2000" b="1">
+                    <a:solidFill>
+                      <a:srgbClr val="1E293B"/>
+                    </a:solidFill>
+                    <a:latin typeface="Calibri"/>
+                  </a:rPr>
+                  <a:t>2.39.</a:t>
+                </a:r>
+                <a:r>
+                  <a:rPr sz="2000">
+                    <a:solidFill>
+                      <a:srgbClr val="1E293B"/>
+                    </a:solidFill>
+                    <a:latin typeface="Calibri"/>
+                  </a:rPr>
+                  <a:t> Cho hình hộp </a:t>
+                </a:r>
+                <a14:m>
+                  <m:oMath xmlns:m="http://schemas.openxmlformats.org/officeDocument/2006/math">
+                    <m:r>
+                      <a:rPr lang="vi-VN" sz="2000" b="0">
+                        <a:solidFill>
+                          <a:srgbClr val="1E293B"/>
+                        </a:solidFill>
+                        <a:latin typeface="Cambria Math" panose="02040503050406030204" pitchFamily="18" charset="0"/>
+                      </a:rPr>
+                      <m:t>OABC.</m:t>
+                    </m:r>
+                    <m:sSup>
+                      <m:e>
+                        <m:r>
+                          <a:rPr lang="vi-VN" sz="2000" b="0">
+                            <a:solidFill>
+                              <a:srgbClr val="1E293B"/>
+                            </a:solidFill>
+                            <a:latin typeface="Cambria Math" panose="02040503050406030204" pitchFamily="18" charset="0"/>
+                          </a:rPr>
+                          <m:t>O</m:t>
+                        </m:r>
+                      </m:e>
+                      <m:sup>
+                        <m:r>
+                          <a:rPr lang="vi-VN" sz="2000" b="0">
+                            <a:solidFill>
+                              <a:srgbClr val="1E293B"/>
+                            </a:solidFill>
+                            <a:latin typeface="Cambria Math" panose="02040503050406030204" pitchFamily="18" charset="0"/>
+                          </a:rPr>
+                          <m:t>′</m:t>
+                        </m:r>
+                      </m:sup>
+                    </m:sSup>
+                    <m:sSup>
+                      <m:e>
+                        <m:r>
+                          <a:rPr lang="vi-VN" sz="2000" b="0">
+                            <a:solidFill>
+                              <a:srgbClr val="1E293B"/>
+                            </a:solidFill>
+                            <a:latin typeface="Cambria Math" panose="02040503050406030204" pitchFamily="18" charset="0"/>
+                          </a:rPr>
+                          <m:t>A</m:t>
+                        </m:r>
+                      </m:e>
+                      <m:sup>
+                        <m:r>
+                          <a:rPr lang="vi-VN" sz="2000" b="0">
+                            <a:solidFill>
+                              <a:srgbClr val="1E293B"/>
+                            </a:solidFill>
+                            <a:latin typeface="Cambria Math" panose="02040503050406030204" pitchFamily="18" charset="0"/>
+                          </a:rPr>
+                          <m:t>′</m:t>
+                        </m:r>
+                      </m:sup>
+                    </m:sSup>
+                    <m:sSup>
+                      <m:e>
+                        <m:r>
+                          <a:rPr lang="vi-VN" sz="2000" b="0">
+                            <a:solidFill>
+                              <a:srgbClr val="1E293B"/>
+                            </a:solidFill>
+                            <a:latin typeface="Cambria Math" panose="02040503050406030204" pitchFamily="18" charset="0"/>
+                          </a:rPr>
+                          <m:t>B</m:t>
+                        </m:r>
+                      </m:e>
+                      <m:sup>
+                        <m:r>
+                          <a:rPr lang="vi-VN" sz="2000" b="0">
+                            <a:solidFill>
+                              <a:srgbClr val="1E293B"/>
+                            </a:solidFill>
+                            <a:latin typeface="Cambria Math" panose="02040503050406030204" pitchFamily="18" charset="0"/>
+                          </a:rPr>
+                          <m:t>′</m:t>
+                        </m:r>
+                      </m:sup>
+                    </m:sSup>
+                    <m:sSup>
+                      <m:e>
+                        <m:r>
+                          <a:rPr lang="vi-VN" sz="2000" b="0">
+                            <a:solidFill>
+                              <a:srgbClr val="1E293B"/>
+                            </a:solidFill>
+                            <a:latin typeface="Cambria Math" panose="02040503050406030204" pitchFamily="18" charset="0"/>
+                          </a:rPr>
+                          <m:t>C</m:t>
+                        </m:r>
+                      </m:e>
+                      <m:sup>
+                        <m:r>
+                          <a:rPr lang="vi-VN" sz="2000" b="0">
+                            <a:solidFill>
+                              <a:srgbClr val="1E293B"/>
+                            </a:solidFill>
+                            <a:latin typeface="Cambria Math" panose="02040503050406030204" pitchFamily="18" charset="0"/>
+                          </a:rPr>
+                          <m:t>′</m:t>
+                        </m:r>
+                      </m:sup>
+                    </m:sSup>
+                  </m:oMath>
+                </a14:m>
+                <a:r>
+                  <a:rPr sz="2000">
+                    <a:solidFill>
+                      <a:srgbClr val="1E293B"/>
+                    </a:solidFill>
+                    <a:latin typeface="Calibri"/>
+                  </a:rPr>
+                  <a:t> có </a:t>
+                </a:r>
+                <a14:m>
+                  <m:oMath xmlns:m="http://schemas.openxmlformats.org/officeDocument/2006/math">
+                    <m:r>
+                      <a:rPr lang="vi-VN" sz="2000" b="0">
+                        <a:solidFill>
+                          <a:srgbClr val="1E293B"/>
+                        </a:solidFill>
+                        <a:latin typeface="Cambria Math" panose="02040503050406030204" pitchFamily="18" charset="0"/>
+                      </a:rPr>
+                      <m:t>A(2;3;1)</m:t>
+                    </m:r>
+                  </m:oMath>
+                </a14:m>
+                <a:r>
+                  <a:rPr sz="2000">
+                    <a:solidFill>
+                      <a:srgbClr val="1E293B"/>
+                    </a:solidFill>
+                    <a:latin typeface="Calibri"/>
+                  </a:rPr>
+                  <a:t>, </a:t>
+                </a:r>
+                <a14:m>
+                  <m:oMath xmlns:m="http://schemas.openxmlformats.org/officeDocument/2006/math">
+                    <m:r>
+                      <a:rPr lang="vi-VN" sz="2000" b="0">
+                        <a:solidFill>
+                          <a:srgbClr val="1E293B"/>
+                        </a:solidFill>
+                        <a:latin typeface="Cambria Math" panose="02040503050406030204" pitchFamily="18" charset="0"/>
+                      </a:rPr>
+                      <m:t>C(−1;2;3)</m:t>
+                    </m:r>
+                  </m:oMath>
+                </a14:m>
+                <a:r>
+                  <a:rPr sz="2000">
+                    <a:solidFill>
+                      <a:srgbClr val="1E293B"/>
+                    </a:solidFill>
+                    <a:latin typeface="Calibri"/>
+                  </a:rPr>
+                  <a:t> và </a:t>
+                </a:r>
+                <a14:m>
+                  <m:oMath xmlns:m="http://schemas.openxmlformats.org/officeDocument/2006/math">
+                    <m:sSup>
+                      <m:e>
+                        <m:r>
+                          <a:rPr lang="vi-VN" sz="2000" b="0">
+                            <a:solidFill>
+                              <a:srgbClr val="1E293B"/>
+                            </a:solidFill>
+                            <a:latin typeface="Cambria Math" panose="02040503050406030204" pitchFamily="18" charset="0"/>
+                          </a:rPr>
+                          <m:t>O</m:t>
+                        </m:r>
+                      </m:e>
+                      <m:sup>
+                        <m:r>
+                          <a:rPr lang="vi-VN" sz="2000" b="0">
+                            <a:solidFill>
+                              <a:srgbClr val="1E293B"/>
+                            </a:solidFill>
+                            <a:latin typeface="Cambria Math" panose="02040503050406030204" pitchFamily="18" charset="0"/>
+                          </a:rPr>
+                          <m:t>′</m:t>
+                        </m:r>
+                      </m:sup>
+                    </m:sSup>
+                    <m:r>
+                      <a:rPr lang="vi-VN" sz="2000" b="0">
+                        <a:solidFill>
+                          <a:srgbClr val="1E293B"/>
+                        </a:solidFill>
+                        <a:latin typeface="Cambria Math" panose="02040503050406030204" pitchFamily="18" charset="0"/>
+                      </a:rPr>
+                      <m:t>(1;−2;2)</m:t>
+                    </m:r>
+                  </m:oMath>
+                </a14:m>
+                <a:r>
+                  <a:rPr sz="2000">
+                    <a:solidFill>
+                      <a:srgbClr val="1E293B"/>
+                    </a:solidFill>
+                    <a:latin typeface="Calibri"/>
+                  </a:rPr>
+                  <a:t>. Tìm toạ độ các đỉnh còn lại của hình hộp.</a:t>
+                </a:r>
+              </a:p>
+            </p:txBody>
+          </p:sp>
+        </mc:Choice>
+        <mc:Fallback>
+          <p:sp>
+            <p:nvSpPr>
+              <p:cNvPr id="10" name="TextBox 9"/>
+              <p:cNvSpPr txBox="1"/>
+              <p:nvPr/>
+            </p:nvSpPr>
+            <p:spPr>
+              <a:xfrm>
+                <a:off x="548640" y="3432048"/>
+                <a:ext cx="11064240" cy="783335"/>
+              </a:xfrm>
+              <a:prstGeom prst="rect">
+                <a:avLst/>
+              </a:prstGeom>
+              <a:noFill/>
+            </p:spPr>
+            <p:txBody>
+              <a:bodyPr wrap="square" anchor="t" lIns="45720" rIns="45720">
+                <a:spAutoFit/>
+              </a:bodyPr>
+              <a:lstStyle/>
+              <a:p>
+                <a:pPr algn="l">
+                  <a:spcAft>
+                    <a:spcPts val="800"/>
+                  </a:spcAft>
+                </a:pPr>
+                <a:r>
+                  <a:rPr sz="2000" b="1">
+                    <a:solidFill>
+                      <a:srgbClr val="1E293B"/>
+                    </a:solidFill>
+                    <a:latin typeface="Calibri"/>
+                  </a:rPr>
+                  <a:t>2.39.</a:t>
+                </a:r>
+                <a:r>
+                  <a:rPr sz="2000">
+                    <a:solidFill>
+                      <a:srgbClr val="1E293B"/>
+                    </a:solidFill>
+                    <a:latin typeface="Calibri"/>
+                  </a:rPr>
+                  <a:t> Cho hình hộp </a:t>
+                </a:r>
+                <a:r>
+                  <a:rPr lang="vi-VN"/>
+                  <a:t>OABC.O'A'B'C'</a:t>
+                </a:r>
+                <a:r>
+                  <a:rPr sz="2000">
+                    <a:solidFill>
+                      <a:srgbClr val="1E293B"/>
+                    </a:solidFill>
+                    <a:latin typeface="Calibri"/>
+                  </a:rPr>
+                  <a:t> có </a:t>
+                </a:r>
+                <a:r>
+                  <a:rPr lang="vi-VN"/>
+                  <a:t>A(2;3;1)</a:t>
+                </a:r>
+                <a:r>
+                  <a:rPr sz="2000">
+                    <a:solidFill>
+                      <a:srgbClr val="1E293B"/>
+                    </a:solidFill>
+                    <a:latin typeface="Calibri"/>
+                  </a:rPr>
+                  <a:t>, </a:t>
+                </a:r>
+                <a:r>
+                  <a:rPr lang="vi-VN"/>
+                  <a:t>C(-1;2;3)</a:t>
+                </a:r>
+                <a:r>
+                  <a:rPr sz="2000">
+                    <a:solidFill>
+                      <a:srgbClr val="1E293B"/>
+                    </a:solidFill>
+                    <a:latin typeface="Calibri"/>
+                  </a:rPr>
+                  <a:t> và </a:t>
+                </a:r>
+                <a:r>
+                  <a:rPr lang="vi-VN"/>
+                  <a:t>O'(1;-2;2)</a:t>
+                </a:r>
+                <a:r>
+                  <a:rPr sz="2000">
+                    <a:solidFill>
+                      <a:srgbClr val="1E293B"/>
+                    </a:solidFill>
+                    <a:latin typeface="Calibri"/>
+                  </a:rPr>
+                  <a:t>. Tìm toạ độ các đỉnh còn lại của hình hộp.</a:t>
+                </a:r>
+              </a:p>
+            </p:txBody>
+          </p:sp>
+        </mc:Fallback>
+      </mc:AlternateContent>
       <p:sp>
         <p:nvSpPr>
-          <p:cNvPr id="10" name="s2_nen"/>
+          <p:cNvPr id="11" name="s3_nen"/>
           <p:cNvSpPr/>
           <p:nvPr/>
         </p:nvSpPr>
         <p:spPr>
           <a:xfrm>
-            <a:off x="548640" y="4242816"/>
+            <a:off x="548640" y="4279392"/>
             <a:ext cx="11064240" cy="874775"/>
           </a:xfrm>
           <a:prstGeom prst="roundRect">
@@ -30759,13 +30908,13 @@
         <mc:Choice xmlns:a14="http://schemas.microsoft.com/office/drawing/2010/main" Requires="a14">
           <p:sp>
             <p:nvSpPr>
-              <p:cNvPr id="11" name="s2_chu"/>
+              <p:cNvPr id="12" name="s3_chu"/>
               <p:cNvSpPr txBox="1"/>
               <p:nvPr/>
             </p:nvSpPr>
             <p:spPr>
               <a:xfrm>
-                <a:off x="713232" y="4279392"/>
+                <a:off x="713232" y="4315968"/>
                 <a:ext cx="10735056" cy="801623"/>
               </a:xfrm>
               <a:prstGeom prst="rect">
@@ -31109,13 +31258,13 @@
         <mc:Fallback>
           <p:sp>
             <p:nvSpPr>
-              <p:cNvPr id="11" name="TextBox 10"/>
+              <p:cNvPr id="12" name="TextBox 11"/>
               <p:cNvSpPr txBox="1"/>
               <p:nvPr/>
             </p:nvSpPr>
             <p:spPr>
               <a:xfrm>
-                <a:off x="713232" y="4279392"/>
+                <a:off x="713232" y="4315968"/>
                 <a:ext cx="10735056" cy="801623"/>
               </a:xfrm>
               <a:prstGeom prst="rect">
@@ -31385,21 +31534,66 @@
                                   </p:childTnLst>
                                 </p:cTn>
                               </p:par>
+                            </p:childTnLst>
+                          </p:cTn>
+                        </p:par>
+                      </p:childTnLst>
+                    </p:cTn>
+                  </p:par>
+                  <p:par>
+                    <p:cTn id="13" fill="hold">
+                      <p:stCondLst>
+                        <p:cond delay="indefinite"/>
+                      </p:stCondLst>
+                      <p:childTnLst>
+                        <p:par>
+                          <p:cTn id="14" fill="hold">
+                            <p:stCondLst>
+                              <p:cond delay="0"/>
+                            </p:stCondLst>
+                            <p:childTnLst>
                               <p:par>
-                                <p:cTn id="13" presetID="1" presetClass="entr" presetSubtype="0" fill="hold" nodeType="withEffect">
+                                <p:cTn id="15" presetID="1" presetClass="entr" presetSubtype="0" fill="hold" nodeType="clickEffect">
                                   <p:stCondLst>
                                     <p:cond delay="0"/>
                                   </p:stCondLst>
                                   <p:childTnLst>
                                     <p:set>
                                       <p:cBhvr>
-                                        <p:cTn id="14" dur="1" fill="hold">
+                                        <p:cTn id="16" dur="1" fill="hold">
                                           <p:stCondLst>
                                             <p:cond delay="0"/>
                                           </p:stCondLst>
                                         </p:cTn>
                                         <p:tgtEl>
                                           <p:spTgt spid="11"/>
+                                        </p:tgtEl>
+                                        <p:attrNameLst>
+                                          <p:attrName>style.visibility</p:attrName>
+                                        </p:attrNameLst>
+                                      </p:cBhvr>
+                                      <p:to>
+                                        <p:strVal val="visible"/>
+                                      </p:to>
+                                    </p:set>
+                                  </p:childTnLst>
+                                </p:cTn>
+                              </p:par>
+                              <p:par>
+                                <p:cTn id="17" presetID="1" presetClass="entr" presetSubtype="0" fill="hold" nodeType="withEffect">
+                                  <p:stCondLst>
+                                    <p:cond delay="0"/>
+                                  </p:stCondLst>
+                                  <p:childTnLst>
+                                    <p:set>
+                                      <p:cBhvr>
+                                        <p:cTn id="18" dur="1" fill="hold">
+                                          <p:stCondLst>
+                                            <p:cond delay="0"/>
+                                          </p:stCondLst>
+                                        </p:cTn>
+                                        <p:tgtEl>
+                                          <p:spTgt spid="12"/>
                                         </p:tgtEl>
                                         <p:attrNameLst>
                                           <p:attrName>style.visibility</p:attrName>
@@ -31682,7 +31876,7 @@
             <p:spPr>
               <a:xfrm>
                 <a:off x="548640" y="1371600"/>
-                <a:ext cx="11064240" cy="1798320"/>
+                <a:ext cx="11064240" cy="783335"/>
               </a:xfrm>
               <a:prstGeom prst="rect">
                 <a:avLst/>
@@ -31987,6 +32181,611 @@
                   <a:t>.</a:t>
                 </a:r>
               </a:p>
+            </p:txBody>
+          </p:sp>
+        </mc:Choice>
+        <mc:Fallback>
+          <p:sp>
+            <p:nvSpPr>
+              <p:cNvPr id="7" name="TextBox 6"/>
+              <p:cNvSpPr txBox="1"/>
+              <p:nvPr/>
+            </p:nvSpPr>
+            <p:spPr>
+              <a:xfrm>
+                <a:off x="548640" y="1371600"/>
+                <a:ext cx="11064240" cy="783335"/>
+              </a:xfrm>
+              <a:prstGeom prst="rect">
+                <a:avLst/>
+              </a:prstGeom>
+              <a:noFill/>
+            </p:spPr>
+            <p:txBody>
+              <a:bodyPr wrap="square" anchor="t" lIns="45720" rIns="45720">
+                <a:spAutoFit/>
+              </a:bodyPr>
+              <a:lstStyle/>
+              <a:p>
+                <a:pPr algn="l">
+                  <a:spcAft>
+                    <a:spcPts val="800"/>
+                  </a:spcAft>
+                </a:pPr>
+                <a:r>
+                  <a:rPr sz="2000" b="1">
+                    <a:solidFill>
+                      <a:srgbClr val="1E293B"/>
+                    </a:solidFill>
+                    <a:latin typeface="Calibri"/>
+                  </a:rPr>
+                  <a:t>2.40.</a:t>
+                </a:r>
+                <a:r>
+                  <a:rPr sz="2000">
+                    <a:solidFill>
+                      <a:srgbClr val="1E293B"/>
+                    </a:solidFill>
+                    <a:latin typeface="Calibri"/>
+                  </a:rPr>
+                  <a:t> Cho </a:t>
+                </a:r>
+                <a:r>
+                  <a:rPr lang="vi-VN"/>
+                  <a:t>\vec{a}=(-2;1;2)</a:t>
+                </a:r>
+                <a:r>
+                  <a:rPr sz="2000">
+                    <a:solidFill>
+                      <a:srgbClr val="1E293B"/>
+                    </a:solidFill>
+                    <a:latin typeface="Calibri"/>
+                  </a:rPr>
+                  <a:t>, </a:t>
+                </a:r>
+                <a:r>
+                  <a:rPr lang="vi-VN"/>
+                  <a:t>\vec{b}=(1;1;-1)</a:t>
+                </a:r>
+                <a:r>
+                  <a:rPr sz="2000">
+                    <a:solidFill>
+                      <a:srgbClr val="1E293B"/>
+                    </a:solidFill>
+                    <a:latin typeface="Calibri"/>
+                  </a:rPr>
+                  <a:t>. a) Xác định toạ độ của </a:t>
+                </a:r>
+                <a:r>
+                  <a:rPr lang="vi-VN"/>
+                  <a:t>\vec{u}=\vec{a}-2\vec{b}</a:t>
+                </a:r>
+                <a:r>
+                  <a:rPr sz="2000">
+                    <a:solidFill>
+                      <a:srgbClr val="1E293B"/>
+                    </a:solidFill>
+                    <a:latin typeface="Calibri"/>
+                  </a:rPr>
+                  <a:t>. b) Tính độ dài của </a:t>
+                </a:r>
+                <a:r>
+                  <a:rPr lang="vi-VN"/>
+                  <a:t>\vec{u}</a:t>
+                </a:r>
+                <a:r>
+                  <a:rPr sz="2000">
+                    <a:solidFill>
+                      <a:srgbClr val="1E293B"/>
+                    </a:solidFill>
+                    <a:latin typeface="Calibri"/>
+                  </a:rPr>
+                  <a:t>. c) Tính </a:t>
+                </a:r>
+                <a:r>
+                  <a:rPr lang="vi-VN"/>
+                  <a:t>\cos(\vec{a},\vec{b})</a:t>
+                </a:r>
+                <a:r>
+                  <a:rPr sz="2000">
+                    <a:solidFill>
+                      <a:srgbClr val="1E293B"/>
+                    </a:solidFill>
+                    <a:latin typeface="Calibri"/>
+                  </a:rPr>
+                  <a:t>.</a:t>
+                </a:r>
+              </a:p>
+            </p:txBody>
+          </p:sp>
+        </mc:Fallback>
+      </mc:AlternateContent>
+      <p:sp>
+        <p:nvSpPr>
+          <p:cNvPr id="8" name="s1_nen"/>
+          <p:cNvSpPr/>
+          <p:nvPr/>
+        </p:nvSpPr>
+        <p:spPr>
+          <a:xfrm>
+            <a:off x="548640" y="2218944"/>
+            <a:ext cx="11064240" cy="844295"/>
+          </a:xfrm>
+          <a:prstGeom prst="roundRect">
+            <a:avLst>
+              <a:gd name="adj" fmla="val 6000"/>
+            </a:avLst>
+          </a:prstGeom>
+          <a:solidFill>
+            <a:srgbClr val="ECFDF3"/>
+          </a:solidFill>
+          <a:ln w="19050">
+            <a:solidFill>
+              <a:srgbClr val="166534"/>
+            </a:solidFill>
+          </a:ln>
+          <a:effectLst/>
+        </p:spPr>
+        <p:style>
+          <a:lnRef idx="1">
+            <a:schemeClr val="accent1"/>
+          </a:lnRef>
+          <a:fillRef idx="3">
+            <a:schemeClr val="accent1"/>
+          </a:fillRef>
+          <a:effectRef idx="2">
+            <a:schemeClr val="accent1"/>
+          </a:effectRef>
+          <a:fontRef idx="minor">
+            <a:schemeClr val="lt1"/>
+          </a:fontRef>
+        </p:style>
+        <p:txBody>
+          <a:bodyPr rtlCol="0" anchor="ctr"/>
+          <a:lstStyle/>
+          <a:p>
+            <a:pPr algn="ctr"/>
+          </a:p>
+        </p:txBody>
+      </p:sp>
+      <mc:AlternateContent xmlns:mc="http://schemas.openxmlformats.org/markup-compatibility/2006">
+        <mc:Choice xmlns:a14="http://schemas.microsoft.com/office/drawing/2010/main" Requires="a14">
+          <p:sp>
+            <p:nvSpPr>
+              <p:cNvPr id="9" name="s1_chu"/>
+              <p:cNvSpPr txBox="1"/>
+              <p:nvPr/>
+            </p:nvSpPr>
+            <p:spPr>
+              <a:xfrm>
+                <a:off x="713232" y="2255520"/>
+                <a:ext cx="10735056" cy="771143"/>
+              </a:xfrm>
+              <a:prstGeom prst="rect">
+                <a:avLst/>
+              </a:prstGeom>
+              <a:noFill/>
+            </p:spPr>
+            <p:txBody>
+              <a:bodyPr wrap="square" anchor="ctr" lIns="45720" rIns="45720">
+                <a:spAutoFit/>
+              </a:bodyPr>
+              <a:lstStyle/>
+              <a:p>
+                <a:pPr algn="l">
+                  <a:spcAft>
+                    <a:spcPts val="800"/>
+                  </a:spcAft>
+                </a:pPr>
+                <a:r>
+                  <a:rPr sz="2000" b="1">
+                    <a:solidFill>
+                      <a:srgbClr val="1E293B"/>
+                    </a:solidFill>
+                    <a:latin typeface="Calibri"/>
+                  </a:rPr>
+                  <a:t>2.40.</a:t>
+                </a:r>
+                <a:r>
+                  <a:rPr sz="2000">
+                    <a:solidFill>
+                      <a:srgbClr val="1E293B"/>
+                    </a:solidFill>
+                    <a:latin typeface="Calibri"/>
+                  </a:rPr>
+                  <a:t> a) </a:t>
+                </a:r>
+                <a14:m>
+                  <m:oMath xmlns:m="http://schemas.openxmlformats.org/officeDocument/2006/math">
+                    <m:acc>
+                      <m:accPr>
+                        <m:chr m:val="⃗"/>
+                      </m:accPr>
+                      <m:e>
+                        <m:r>
+                          <a:rPr lang="vi-VN" sz="2000" b="0">
+                            <a:solidFill>
+                              <a:srgbClr val="1E293B"/>
+                            </a:solidFill>
+                            <a:latin typeface="Cambria Math" panose="02040503050406030204" pitchFamily="18" charset="0"/>
+                          </a:rPr>
+                          <m:t>u</m:t>
+                        </m:r>
+                      </m:e>
+                    </m:acc>
+                    <m:r>
+                      <a:rPr lang="vi-VN" sz="2000" b="0">
+                        <a:solidFill>
+                          <a:srgbClr val="1E293B"/>
+                        </a:solidFill>
+                        <a:latin typeface="Cambria Math" panose="02040503050406030204" pitchFamily="18" charset="0"/>
+                      </a:rPr>
+                      <m:t>=(−4;−1;4)</m:t>
+                    </m:r>
+                  </m:oMath>
+                </a14:m>
+                <a:r>
+                  <a:rPr sz="2000">
+                    <a:solidFill>
+                      <a:srgbClr val="1E293B"/>
+                    </a:solidFill>
+                    <a:latin typeface="Calibri"/>
+                  </a:rPr>
+                  <a:t>. b) </a:t>
+                </a:r>
+                <a14:m>
+                  <m:oMath xmlns:m="http://schemas.openxmlformats.org/officeDocument/2006/math">
+                    <m:r>
+                      <a:rPr lang="vi-VN" sz="2000" b="0">
+                        <a:solidFill>
+                          <a:srgbClr val="1E293B"/>
+                        </a:solidFill>
+                        <a:latin typeface="Cambria Math" panose="02040503050406030204" pitchFamily="18" charset="0"/>
+                      </a:rPr>
+                      <m:t>|</m:t>
+                    </m:r>
+                    <m:acc>
+                      <m:accPr>
+                        <m:chr m:val="⃗"/>
+                      </m:accPr>
+                      <m:e>
+                        <m:r>
+                          <a:rPr lang="vi-VN" sz="2000" b="0">
+                            <a:solidFill>
+                              <a:srgbClr val="1E293B"/>
+                            </a:solidFill>
+                            <a:latin typeface="Cambria Math" panose="02040503050406030204" pitchFamily="18" charset="0"/>
+                          </a:rPr>
+                          <m:t>u</m:t>
+                        </m:r>
+                      </m:e>
+                    </m:acc>
+                    <m:r>
+                      <a:rPr lang="vi-VN" sz="2000" b="0">
+                        <a:solidFill>
+                          <a:srgbClr val="1E293B"/>
+                        </a:solidFill>
+                        <a:latin typeface="Cambria Math" panose="02040503050406030204" pitchFamily="18" charset="0"/>
+                      </a:rPr>
+                      <m:t>|=</m:t>
+                    </m:r>
+                    <m:rad>
+                      <m:radPr>
+                        <m:degHide m:val="on"/>
+                      </m:radPr>
+                      <m:deg/>
+                      <m:e>
+                        <m:r>
+                          <a:rPr lang="vi-VN" sz="2000" b="0">
+                            <a:solidFill>
+                              <a:srgbClr val="1E293B"/>
+                            </a:solidFill>
+                            <a:latin typeface="Cambria Math" panose="02040503050406030204" pitchFamily="18" charset="0"/>
+                          </a:rPr>
+                          <m:t>33</m:t>
+                        </m:r>
+                      </m:e>
+                    </m:rad>
+                  </m:oMath>
+                </a14:m>
+                <a:r>
+                  <a:rPr sz="2000">
+                    <a:solidFill>
+                      <a:srgbClr val="1E293B"/>
+                    </a:solidFill>
+                    <a:latin typeface="Calibri"/>
+                  </a:rPr>
+                  <a:t>. c) </a:t>
+                </a:r>
+                <a14:m>
+                  <m:oMath xmlns:m="http://schemas.openxmlformats.org/officeDocument/2006/math">
+                    <m:r>
+                      <m:rPr>
+                        <m:sty m:val="p"/>
+                      </m:rPr>
+                      <a:rPr lang="vi-VN" sz="2000" b="0">
+                        <a:solidFill>
+                          <a:srgbClr val="1E293B"/>
+                        </a:solidFill>
+                        <a:latin typeface="Cambria Math" panose="02040503050406030204" pitchFamily="18" charset="0"/>
+                      </a:rPr>
+                      <m:t>cos</m:t>
+                    </m:r>
+                    <m:r>
+                      <a:rPr lang="vi-VN" sz="2000" b="0">
+                        <a:solidFill>
+                          <a:srgbClr val="1E293B"/>
+                        </a:solidFill>
+                        <a:latin typeface="Cambria Math" panose="02040503050406030204" pitchFamily="18" charset="0"/>
+                      </a:rPr>
+                      <m:t>(</m:t>
+                    </m:r>
+                    <m:acc>
+                      <m:accPr>
+                        <m:chr m:val="⃗"/>
+                      </m:accPr>
+                      <m:e>
+                        <m:r>
+                          <a:rPr lang="vi-VN" sz="2000" b="0">
+                            <a:solidFill>
+                              <a:srgbClr val="1E293B"/>
+                            </a:solidFill>
+                            <a:latin typeface="Cambria Math" panose="02040503050406030204" pitchFamily="18" charset="0"/>
+                          </a:rPr>
+                          <m:t>a</m:t>
+                        </m:r>
+                      </m:e>
+                    </m:acc>
+                    <m:r>
+                      <a:rPr lang="vi-VN" sz="2000" b="0">
+                        <a:solidFill>
+                          <a:srgbClr val="1E293B"/>
+                        </a:solidFill>
+                        <a:latin typeface="Cambria Math" panose="02040503050406030204" pitchFamily="18" charset="0"/>
+                      </a:rPr>
+                      <m:t>,</m:t>
+                    </m:r>
+                    <m:acc>
+                      <m:accPr>
+                        <m:chr m:val="⃗"/>
+                      </m:accPr>
+                      <m:e>
+                        <m:r>
+                          <a:rPr lang="vi-VN" sz="2000" b="0">
+                            <a:solidFill>
+                              <a:srgbClr val="1E293B"/>
+                            </a:solidFill>
+                            <a:latin typeface="Cambria Math" panose="02040503050406030204" pitchFamily="18" charset="0"/>
+                          </a:rPr>
+                          <m:t>b</m:t>
+                        </m:r>
+                      </m:e>
+                    </m:acc>
+                    <m:r>
+                      <a:rPr lang="vi-VN" sz="2000" b="0">
+                        <a:solidFill>
+                          <a:srgbClr val="1E293B"/>
+                        </a:solidFill>
+                        <a:latin typeface="Cambria Math" panose="02040503050406030204" pitchFamily="18" charset="0"/>
+                      </a:rPr>
+                      <m:t>)=</m:t>
+                    </m:r>
+                    <m:f>
+                      <m:fPr>
+                        <m:type m:val="bar"/>
+                      </m:fPr>
+                      <m:num>
+                        <m:r>
+                          <a:rPr lang="vi-VN" sz="2000" b="0">
+                            <a:solidFill>
+                              <a:srgbClr val="1E293B"/>
+                            </a:solidFill>
+                            <a:latin typeface="Cambria Math" panose="02040503050406030204" pitchFamily="18" charset="0"/>
+                          </a:rPr>
+                          <m:t>−3</m:t>
+                        </m:r>
+                      </m:num>
+                      <m:den>
+                        <m:r>
+                          <a:rPr lang="vi-VN" sz="2000" b="0">
+                            <a:solidFill>
+                              <a:srgbClr val="1E293B"/>
+                            </a:solidFill>
+                            <a:latin typeface="Cambria Math" panose="02040503050406030204" pitchFamily="18" charset="0"/>
+                          </a:rPr>
+                          <m:t>3·</m:t>
+                        </m:r>
+                        <m:rad>
+                          <m:radPr>
+                            <m:degHide m:val="on"/>
+                          </m:radPr>
+                          <m:deg/>
+                          <m:e>
+                            <m:r>
+                              <a:rPr lang="vi-VN" sz="2000" b="0">
+                                <a:solidFill>
+                                  <a:srgbClr val="1E293B"/>
+                                </a:solidFill>
+                                <a:latin typeface="Cambria Math" panose="02040503050406030204" pitchFamily="18" charset="0"/>
+                              </a:rPr>
+                              <m:t>3</m:t>
+                            </m:r>
+                          </m:e>
+                        </m:rad>
+                      </m:den>
+                    </m:f>
+                    <m:r>
+                      <a:rPr lang="vi-VN" sz="2000" b="0">
+                        <a:solidFill>
+                          <a:srgbClr val="1E293B"/>
+                        </a:solidFill>
+                        <a:latin typeface="Cambria Math" panose="02040503050406030204" pitchFamily="18" charset="0"/>
+                      </a:rPr>
+                      <m:t>=−</m:t>
+                    </m:r>
+                    <m:f>
+                      <m:fPr>
+                        <m:type m:val="bar"/>
+                      </m:fPr>
+                      <m:num>
+                        <m:rad>
+                          <m:radPr>
+                            <m:degHide m:val="on"/>
+                          </m:radPr>
+                          <m:deg/>
+                          <m:e>
+                            <m:r>
+                              <a:rPr lang="vi-VN" sz="2000" b="0">
+                                <a:solidFill>
+                                  <a:srgbClr val="1E293B"/>
+                                </a:solidFill>
+                                <a:latin typeface="Cambria Math" panose="02040503050406030204" pitchFamily="18" charset="0"/>
+                              </a:rPr>
+                              <m:t>3</m:t>
+                            </m:r>
+                          </m:e>
+                        </m:rad>
+                      </m:num>
+                      <m:den>
+                        <m:r>
+                          <a:rPr lang="vi-VN" sz="2000" b="0">
+                            <a:solidFill>
+                              <a:srgbClr val="1E293B"/>
+                            </a:solidFill>
+                            <a:latin typeface="Cambria Math" panose="02040503050406030204" pitchFamily="18" charset="0"/>
+                          </a:rPr>
+                          <m:t>3</m:t>
+                        </m:r>
+                      </m:den>
+                    </m:f>
+                  </m:oMath>
+                </a14:m>
+                <a:r>
+                  <a:rPr sz="2000">
+                    <a:solidFill>
+                      <a:srgbClr val="1E293B"/>
+                    </a:solidFill>
+                    <a:latin typeface="Calibri"/>
+                  </a:rPr>
+                  <a:t>.</a:t>
+                </a:r>
+              </a:p>
+            </p:txBody>
+          </p:sp>
+        </mc:Choice>
+        <mc:Fallback>
+          <p:sp>
+            <p:nvSpPr>
+              <p:cNvPr id="9" name="TextBox 8"/>
+              <p:cNvSpPr txBox="1"/>
+              <p:nvPr/>
+            </p:nvSpPr>
+            <p:spPr>
+              <a:xfrm>
+                <a:off x="713232" y="2255520"/>
+                <a:ext cx="10735056" cy="771143"/>
+              </a:xfrm>
+              <a:prstGeom prst="rect">
+                <a:avLst/>
+              </a:prstGeom>
+              <a:noFill/>
+            </p:spPr>
+            <p:txBody>
+              <a:bodyPr wrap="square" anchor="ctr" lIns="45720" rIns="45720">
+                <a:spAutoFit/>
+              </a:bodyPr>
+              <a:lstStyle/>
+              <a:p>
+                <a:pPr algn="l">
+                  <a:spcAft>
+                    <a:spcPts val="800"/>
+                  </a:spcAft>
+                </a:pPr>
+                <a:r>
+                  <a:rPr sz="2000" b="1">
+                    <a:solidFill>
+                      <a:srgbClr val="1E293B"/>
+                    </a:solidFill>
+                    <a:latin typeface="Calibri"/>
+                  </a:rPr>
+                  <a:t>2.40.</a:t>
+                </a:r>
+                <a:r>
+                  <a:rPr sz="2000">
+                    <a:solidFill>
+                      <a:srgbClr val="1E293B"/>
+                    </a:solidFill>
+                    <a:latin typeface="Calibri"/>
+                  </a:rPr>
+                  <a:t> a) </a:t>
+                </a:r>
+                <a:r>
+                  <a:rPr lang="vi-VN"/>
+                  <a:t>\vec{u}=(-4;-1;4)</a:t>
+                </a:r>
+                <a:r>
+                  <a:rPr sz="2000">
+                    <a:solidFill>
+                      <a:srgbClr val="1E293B"/>
+                    </a:solidFill>
+                    <a:latin typeface="Calibri"/>
+                  </a:rPr>
+                  <a:t>. b) </a:t>
+                </a:r>
+                <a:r>
+                  <a:rPr lang="vi-VN"/>
+                  <a:t>|\vec{u}|=\sqrt{33}</a:t>
+                </a:r>
+                <a:r>
+                  <a:rPr sz="2000">
+                    <a:solidFill>
+                      <a:srgbClr val="1E293B"/>
+                    </a:solidFill>
+                    <a:latin typeface="Calibri"/>
+                  </a:rPr>
+                  <a:t>. c) </a:t>
+                </a:r>
+                <a:r>
+                  <a:rPr lang="vi-VN"/>
+                  <a:t>\cos(\vec{a},\vec{b})=\frac{-3}{3\cdot\sqrt{3}}=-\frac{\sqrt{3}}{3}</a:t>
+                </a:r>
+                <a:r>
+                  <a:rPr sz="2000">
+                    <a:solidFill>
+                      <a:srgbClr val="1E293B"/>
+                    </a:solidFill>
+                    <a:latin typeface="Calibri"/>
+                  </a:rPr>
+                  <a:t>.</a:t>
+                </a:r>
+              </a:p>
+            </p:txBody>
+          </p:sp>
+        </mc:Fallback>
+      </mc:AlternateContent>
+      <mc:AlternateContent xmlns:mc="http://schemas.openxmlformats.org/markup-compatibility/2006">
+        <mc:Choice xmlns:a14="http://schemas.microsoft.com/office/drawing/2010/main" Requires="a14">
+          <p:sp>
+            <p:nvSpPr>
+              <p:cNvPr id="10" name="s2_chu"/>
+              <p:cNvSpPr txBox="1"/>
+              <p:nvPr/>
+            </p:nvSpPr>
+            <p:spPr>
+              <a:xfrm>
+                <a:off x="548640" y="3127248"/>
+                <a:ext cx="11064240" cy="1088136"/>
+              </a:xfrm>
+              <a:prstGeom prst="rect">
+                <a:avLst/>
+              </a:prstGeom>
+              <a:noFill/>
+            </p:spPr>
+            <p:txBody>
+              <a:bodyPr wrap="square" anchor="t" lIns="45720" rIns="45720">
+                <a:spAutoFit/>
+              </a:bodyPr>
+              <a:lstStyle/>
               <a:p>
                 <a:pPr algn="l">
                   <a:spcAft>
@@ -32377,14 +33176,14 @@
         <mc:Fallback>
           <p:sp>
             <p:nvSpPr>
-              <p:cNvPr id="7" name="TextBox 6"/>
+              <p:cNvPr id="10" name="TextBox 9"/>
               <p:cNvSpPr txBox="1"/>
               <p:nvPr/>
             </p:nvSpPr>
             <p:spPr>
               <a:xfrm>
-                <a:off x="548640" y="1371600"/>
-                <a:ext cx="11064240" cy="1798320"/>
+                <a:off x="548640" y="3127248"/>
+                <a:ext cx="11064240" cy="1088136"/>
               </a:xfrm>
               <a:prstGeom prst="rect">
                 <a:avLst/>
@@ -32409,96 +33208,6 @@
                     </a:solidFill>
                     <a:latin typeface="Calibri"/>
                   </a:rPr>
-                  <a:t>2.40.</a:t>
-                </a:r>
-                <a:r>
-                  <a:rPr sz="2000">
-                    <a:solidFill>
-                      <a:srgbClr val="1E293B"/>
-                    </a:solidFill>
-                    <a:latin typeface="Calibri"/>
-                  </a:rPr>
-                  <a:t> Cho </a:t>
-                </a:r>
-                <a:r>
-                  <a:rPr lang="vi-VN"/>
-                  <a:t>\vec{a}=(-2;1;2)</a:t>
-                </a:r>
-                <a:r>
-                  <a:rPr sz="2000">
-                    <a:solidFill>
-                      <a:srgbClr val="1E293B"/>
-                    </a:solidFill>
-                    <a:latin typeface="Calibri"/>
-                  </a:rPr>
-                  <a:t>, </a:t>
-                </a:r>
-                <a:r>
-                  <a:rPr lang="vi-VN"/>
-                  <a:t>\vec{b}=(1;1;-1)</a:t>
-                </a:r>
-                <a:r>
-                  <a:rPr sz="2000">
-                    <a:solidFill>
-                      <a:srgbClr val="1E293B"/>
-                    </a:solidFill>
-                    <a:latin typeface="Calibri"/>
-                  </a:rPr>
-                  <a:t>. a) Xác định toạ độ của </a:t>
-                </a:r>
-                <a:r>
-                  <a:rPr lang="vi-VN"/>
-                  <a:t>\vec{u}=\vec{a}-2\vec{b}</a:t>
-                </a:r>
-                <a:r>
-                  <a:rPr sz="2000">
-                    <a:solidFill>
-                      <a:srgbClr val="1E293B"/>
-                    </a:solidFill>
-                    <a:latin typeface="Calibri"/>
-                  </a:rPr>
-                  <a:t>. b) Tính độ dài của </a:t>
-                </a:r>
-                <a:r>
-                  <a:rPr lang="vi-VN"/>
-                  <a:t>\vec{u}</a:t>
-                </a:r>
-                <a:r>
-                  <a:rPr sz="2000">
-                    <a:solidFill>
-                      <a:srgbClr val="1E293B"/>
-                    </a:solidFill>
-                    <a:latin typeface="Calibri"/>
-                  </a:rPr>
-                  <a:t>. c) Tính </a:t>
-                </a:r>
-                <a:r>
-                  <a:rPr lang="vi-VN"/>
-                  <a:t>\cos(\vec{a},\vec{b})</a:t>
-                </a:r>
-                <a:r>
-                  <a:rPr sz="2000">
-                    <a:solidFill>
-                      <a:srgbClr val="1E293B"/>
-                    </a:solidFill>
-                    <a:latin typeface="Calibri"/>
-                  </a:rPr>
-                  <a:t>.</a:t>
-                </a:r>
-              </a:p>
-              <a:p>
-                <a:pPr algn="l">
-                  <a:spcAft>
-                    <a:spcPts val="800"/>
-                  </a:spcAft>
-                </a:pPr>
-                <a:r>
-                  <a:rPr sz="2000" b="1">
-                    <a:solidFill>
-                      <a:srgbClr val="1E293B"/>
-                    </a:solidFill>
-                    <a:latin typeface="Calibri"/>
-                  </a:rPr>
                   <a:t>2.41.</a:t>
                 </a:r>
                 <a:r>
@@ -32673,476 +33382,13 @@
       </mc:AlternateContent>
       <p:sp>
         <p:nvSpPr>
-          <p:cNvPr id="8" name="s1_nen"/>
+          <p:cNvPr id="11" name="s3_nen"/>
           <p:cNvSpPr/>
           <p:nvPr/>
         </p:nvSpPr>
         <p:spPr>
           <a:xfrm>
-            <a:off x="548640" y="3307080"/>
-            <a:ext cx="11064240" cy="844295"/>
-          </a:xfrm>
-          <a:prstGeom prst="roundRect">
-            <a:avLst>
-              <a:gd name="adj" fmla="val 6000"/>
-            </a:avLst>
-          </a:prstGeom>
-          <a:solidFill>
-            <a:srgbClr val="ECFDF3"/>
-          </a:solidFill>
-          <a:ln w="19050">
-            <a:solidFill>
-              <a:srgbClr val="166534"/>
-            </a:solidFill>
-          </a:ln>
-          <a:effectLst/>
-        </p:spPr>
-        <p:style>
-          <a:lnRef idx="1">
-            <a:schemeClr val="accent1"/>
-          </a:lnRef>
-          <a:fillRef idx="3">
-            <a:schemeClr val="accent1"/>
-          </a:fillRef>
-          <a:effectRef idx="2">
-            <a:schemeClr val="accent1"/>
-          </a:effectRef>
-          <a:fontRef idx="minor">
-            <a:schemeClr val="lt1"/>
-          </a:fontRef>
-        </p:style>
-        <p:txBody>
-          <a:bodyPr rtlCol="0" anchor="ctr"/>
-          <a:lstStyle/>
-          <a:p>
-            <a:pPr algn="ctr"/>
-          </a:p>
-        </p:txBody>
-      </p:sp>
-      <mc:AlternateContent xmlns:mc="http://schemas.openxmlformats.org/markup-compatibility/2006">
-        <mc:Choice xmlns:a14="http://schemas.microsoft.com/office/drawing/2010/main" Requires="a14">
-          <p:sp>
-            <p:nvSpPr>
-              <p:cNvPr id="9" name="s1_chu"/>
-              <p:cNvSpPr txBox="1"/>
-              <p:nvPr/>
-            </p:nvSpPr>
-            <p:spPr>
-              <a:xfrm>
-                <a:off x="713232" y="3343656"/>
-                <a:ext cx="10735056" cy="771143"/>
-              </a:xfrm>
-              <a:prstGeom prst="rect">
-                <a:avLst/>
-              </a:prstGeom>
-              <a:noFill/>
-            </p:spPr>
-            <p:txBody>
-              <a:bodyPr wrap="square" anchor="ctr" lIns="45720" rIns="45720">
-                <a:spAutoFit/>
-              </a:bodyPr>
-              <a:lstStyle/>
-              <a:p>
-                <a:pPr algn="l">
-                  <a:spcAft>
-                    <a:spcPts val="800"/>
-                  </a:spcAft>
-                </a:pPr>
-                <a:r>
-                  <a:rPr sz="2000" b="1">
-                    <a:solidFill>
-                      <a:srgbClr val="1E293B"/>
-                    </a:solidFill>
-                    <a:latin typeface="Calibri"/>
-                  </a:rPr>
-                  <a:t>2.40.</a:t>
-                </a:r>
-                <a:r>
-                  <a:rPr sz="2000">
-                    <a:solidFill>
-                      <a:srgbClr val="1E293B"/>
-                    </a:solidFill>
-                    <a:latin typeface="Calibri"/>
-                  </a:rPr>
-                  <a:t> a) </a:t>
-                </a:r>
-                <a14:m>
-                  <m:oMath xmlns:m="http://schemas.openxmlformats.org/officeDocument/2006/math">
-                    <m:acc>
-                      <m:accPr>
-                        <m:chr m:val="⃗"/>
-                      </m:accPr>
-                      <m:e>
-                        <m:r>
-                          <a:rPr lang="vi-VN" sz="2000" b="0">
-                            <a:solidFill>
-                              <a:srgbClr val="1E293B"/>
-                            </a:solidFill>
-                            <a:latin typeface="Cambria Math" panose="02040503050406030204" pitchFamily="18" charset="0"/>
-                          </a:rPr>
-                          <m:t>u</m:t>
-                        </m:r>
-                      </m:e>
-                    </m:acc>
-                    <m:r>
-                      <a:rPr lang="vi-VN" sz="2000" b="0">
-                        <a:solidFill>
-                          <a:srgbClr val="1E293B"/>
-                        </a:solidFill>
-                        <a:latin typeface="Cambria Math" panose="02040503050406030204" pitchFamily="18" charset="0"/>
-                      </a:rPr>
-                      <m:t>=(−4;−1;4)</m:t>
-                    </m:r>
-                  </m:oMath>
-                </a14:m>
-                <a:r>
-                  <a:rPr sz="2000">
-                    <a:solidFill>
-                      <a:srgbClr val="1E293B"/>
-                    </a:solidFill>
-                    <a:latin typeface="Calibri"/>
-                  </a:rPr>
-                  <a:t>. b) </a:t>
-                </a:r>
-                <a14:m>
-                  <m:oMath xmlns:m="http://schemas.openxmlformats.org/officeDocument/2006/math">
-                    <m:r>
-                      <a:rPr lang="vi-VN" sz="2000" b="0">
-                        <a:solidFill>
-                          <a:srgbClr val="1E293B"/>
-                        </a:solidFill>
-                        <a:latin typeface="Cambria Math" panose="02040503050406030204" pitchFamily="18" charset="0"/>
-                      </a:rPr>
-                      <m:t>|</m:t>
-                    </m:r>
-                    <m:acc>
-                      <m:accPr>
-                        <m:chr m:val="⃗"/>
-                      </m:accPr>
-                      <m:e>
-                        <m:r>
-                          <a:rPr lang="vi-VN" sz="2000" b="0">
-                            <a:solidFill>
-                              <a:srgbClr val="1E293B"/>
-                            </a:solidFill>
-                            <a:latin typeface="Cambria Math" panose="02040503050406030204" pitchFamily="18" charset="0"/>
-                          </a:rPr>
-                          <m:t>u</m:t>
-                        </m:r>
-                      </m:e>
-                    </m:acc>
-                    <m:r>
-                      <a:rPr lang="vi-VN" sz="2000" b="0">
-                        <a:solidFill>
-                          <a:srgbClr val="1E293B"/>
-                        </a:solidFill>
-                        <a:latin typeface="Cambria Math" panose="02040503050406030204" pitchFamily="18" charset="0"/>
-                      </a:rPr>
-                      <m:t>|=</m:t>
-                    </m:r>
-                    <m:rad>
-                      <m:radPr>
-                        <m:degHide m:val="on"/>
-                      </m:radPr>
-                      <m:deg/>
-                      <m:e>
-                        <m:r>
-                          <a:rPr lang="vi-VN" sz="2000" b="0">
-                            <a:solidFill>
-                              <a:srgbClr val="1E293B"/>
-                            </a:solidFill>
-                            <a:latin typeface="Cambria Math" panose="02040503050406030204" pitchFamily="18" charset="0"/>
-                          </a:rPr>
-                          <m:t>33</m:t>
-                        </m:r>
-                      </m:e>
-                    </m:rad>
-                  </m:oMath>
-                </a14:m>
-                <a:r>
-                  <a:rPr sz="2000">
-                    <a:solidFill>
-                      <a:srgbClr val="1E293B"/>
-                    </a:solidFill>
-                    <a:latin typeface="Calibri"/>
-                  </a:rPr>
-                  <a:t>. c) </a:t>
-                </a:r>
-                <a14:m>
-                  <m:oMath xmlns:m="http://schemas.openxmlformats.org/officeDocument/2006/math">
-                    <m:r>
-                      <m:rPr>
-                        <m:sty m:val="p"/>
-                      </m:rPr>
-                      <a:rPr lang="vi-VN" sz="2000" b="0">
-                        <a:solidFill>
-                          <a:srgbClr val="1E293B"/>
-                        </a:solidFill>
-                        <a:latin typeface="Cambria Math" panose="02040503050406030204" pitchFamily="18" charset="0"/>
-                      </a:rPr>
-                      <m:t>cos</m:t>
-                    </m:r>
-                    <m:r>
-                      <a:rPr lang="vi-VN" sz="2000" b="0">
-                        <a:solidFill>
-                          <a:srgbClr val="1E293B"/>
-                        </a:solidFill>
-                        <a:latin typeface="Cambria Math" panose="02040503050406030204" pitchFamily="18" charset="0"/>
-                      </a:rPr>
-                      <m:t>(</m:t>
-                    </m:r>
-                    <m:acc>
-                      <m:accPr>
-                        <m:chr m:val="⃗"/>
-                      </m:accPr>
-                      <m:e>
-                        <m:r>
-                          <a:rPr lang="vi-VN" sz="2000" b="0">
-                            <a:solidFill>
-                              <a:srgbClr val="1E293B"/>
-                            </a:solidFill>
-                            <a:latin typeface="Cambria Math" panose="02040503050406030204" pitchFamily="18" charset="0"/>
-                          </a:rPr>
-                          <m:t>a</m:t>
-                        </m:r>
-                      </m:e>
-                    </m:acc>
-                    <m:r>
-                      <a:rPr lang="vi-VN" sz="2000" b="0">
-                        <a:solidFill>
-                          <a:srgbClr val="1E293B"/>
-                        </a:solidFill>
-                        <a:latin typeface="Cambria Math" panose="02040503050406030204" pitchFamily="18" charset="0"/>
-                      </a:rPr>
-                      <m:t>,</m:t>
-                    </m:r>
-                    <m:acc>
-                      <m:accPr>
-                        <m:chr m:val="⃗"/>
-                      </m:accPr>
-                      <m:e>
-                        <m:r>
-                          <a:rPr lang="vi-VN" sz="2000" b="0">
-                            <a:solidFill>
-                              <a:srgbClr val="1E293B"/>
-                            </a:solidFill>
-                            <a:latin typeface="Cambria Math" panose="02040503050406030204" pitchFamily="18" charset="0"/>
-                          </a:rPr>
-                          <m:t>b</m:t>
-                        </m:r>
-                      </m:e>
-                    </m:acc>
-                    <m:r>
-                      <a:rPr lang="vi-VN" sz="2000" b="0">
-                        <a:solidFill>
-                          <a:srgbClr val="1E293B"/>
-                        </a:solidFill>
-                        <a:latin typeface="Cambria Math" panose="02040503050406030204" pitchFamily="18" charset="0"/>
-                      </a:rPr>
-                      <m:t>)=</m:t>
-                    </m:r>
-                    <m:f>
-                      <m:fPr>
-                        <m:type m:val="bar"/>
-                      </m:fPr>
-                      <m:num>
-                        <m:r>
-                          <a:rPr lang="vi-VN" sz="2000" b="0">
-                            <a:solidFill>
-                              <a:srgbClr val="1E293B"/>
-                            </a:solidFill>
-                            <a:latin typeface="Cambria Math" panose="02040503050406030204" pitchFamily="18" charset="0"/>
-                          </a:rPr>
-                          <m:t>−3</m:t>
-                        </m:r>
-                      </m:num>
-                      <m:den>
-                        <m:r>
-                          <a:rPr lang="vi-VN" sz="2000" b="0">
-                            <a:solidFill>
-                              <a:srgbClr val="1E293B"/>
-                            </a:solidFill>
-                            <a:latin typeface="Cambria Math" panose="02040503050406030204" pitchFamily="18" charset="0"/>
-                          </a:rPr>
-                          <m:t>3·</m:t>
-                        </m:r>
-                        <m:rad>
-                          <m:radPr>
-                            <m:degHide m:val="on"/>
-                          </m:radPr>
-                          <m:deg/>
-                          <m:e>
-                            <m:r>
-                              <a:rPr lang="vi-VN" sz="2000" b="0">
-                                <a:solidFill>
-                                  <a:srgbClr val="1E293B"/>
-                                </a:solidFill>
-                                <a:latin typeface="Cambria Math" panose="02040503050406030204" pitchFamily="18" charset="0"/>
-                              </a:rPr>
-                              <m:t>3</m:t>
-                            </m:r>
-                          </m:e>
-                        </m:rad>
-                      </m:den>
-                    </m:f>
-                    <m:r>
-                      <a:rPr lang="vi-VN" sz="2000" b="0">
-                        <a:solidFill>
-                          <a:srgbClr val="1E293B"/>
-                        </a:solidFill>
-                        <a:latin typeface="Cambria Math" panose="02040503050406030204" pitchFamily="18" charset="0"/>
-                      </a:rPr>
-                      <m:t>=−</m:t>
-                    </m:r>
-                    <m:f>
-                      <m:fPr>
-                        <m:type m:val="bar"/>
-                      </m:fPr>
-                      <m:num>
-                        <m:rad>
-                          <m:radPr>
-                            <m:degHide m:val="on"/>
-                          </m:radPr>
-                          <m:deg/>
-                          <m:e>
-                            <m:r>
-                              <a:rPr lang="vi-VN" sz="2000" b="0">
-                                <a:solidFill>
-                                  <a:srgbClr val="1E293B"/>
-                                </a:solidFill>
-                                <a:latin typeface="Cambria Math" panose="02040503050406030204" pitchFamily="18" charset="0"/>
-                              </a:rPr>
-                              <m:t>3</m:t>
-                            </m:r>
-                          </m:e>
-                        </m:rad>
-                      </m:num>
-                      <m:den>
-                        <m:r>
-                          <a:rPr lang="vi-VN" sz="2000" b="0">
-                            <a:solidFill>
-                              <a:srgbClr val="1E293B"/>
-                            </a:solidFill>
-                            <a:latin typeface="Cambria Math" panose="02040503050406030204" pitchFamily="18" charset="0"/>
-                          </a:rPr>
-                          <m:t>3</m:t>
-                        </m:r>
-                      </m:den>
-                    </m:f>
-                  </m:oMath>
-                </a14:m>
-                <a:r>
-                  <a:rPr sz="2000">
-                    <a:solidFill>
-                      <a:srgbClr val="1E293B"/>
-                    </a:solidFill>
-                    <a:latin typeface="Calibri"/>
-                  </a:rPr>
-                  <a:t>.</a:t>
-                </a:r>
-              </a:p>
-            </p:txBody>
-          </p:sp>
-        </mc:Choice>
-        <mc:Fallback>
-          <p:sp>
-            <p:nvSpPr>
-              <p:cNvPr id="9" name="TextBox 8"/>
-              <p:cNvSpPr txBox="1"/>
-              <p:nvPr/>
-            </p:nvSpPr>
-            <p:spPr>
-              <a:xfrm>
-                <a:off x="713232" y="3343656"/>
-                <a:ext cx="10735056" cy="771143"/>
-              </a:xfrm>
-              <a:prstGeom prst="rect">
-                <a:avLst/>
-              </a:prstGeom>
-              <a:noFill/>
-            </p:spPr>
-            <p:txBody>
-              <a:bodyPr wrap="square" anchor="ctr" lIns="45720" rIns="45720">
-                <a:spAutoFit/>
-              </a:bodyPr>
-              <a:lstStyle/>
-              <a:p>
-                <a:pPr algn="l">
-                  <a:spcAft>
-                    <a:spcPts val="800"/>
-                  </a:spcAft>
-                </a:pPr>
-                <a:r>
-                  <a:rPr sz="2000" b="1">
-                    <a:solidFill>
-                      <a:srgbClr val="1E293B"/>
-                    </a:solidFill>
-                    <a:latin typeface="Calibri"/>
-                  </a:rPr>
-                  <a:t>2.40.</a:t>
-                </a:r>
-                <a:r>
-                  <a:rPr sz="2000">
-                    <a:solidFill>
-                      <a:srgbClr val="1E293B"/>
-                    </a:solidFill>
-                    <a:latin typeface="Calibri"/>
-                  </a:rPr>
-                  <a:t> a) </a:t>
-                </a:r>
-                <a:r>
-                  <a:rPr lang="vi-VN"/>
-                  <a:t>\vec{u}=(-4;-1;4)</a:t>
-                </a:r>
-                <a:r>
-                  <a:rPr sz="2000">
-                    <a:solidFill>
-                      <a:srgbClr val="1E293B"/>
-                    </a:solidFill>
-                    <a:latin typeface="Calibri"/>
-                  </a:rPr>
-                  <a:t>. b) </a:t>
-                </a:r>
-                <a:r>
-                  <a:rPr lang="vi-VN"/>
-                  <a:t>|\vec{u}|=\sqrt{33}</a:t>
-                </a:r>
-                <a:r>
-                  <a:rPr sz="2000">
-                    <a:solidFill>
-                      <a:srgbClr val="1E293B"/>
-                    </a:solidFill>
-                    <a:latin typeface="Calibri"/>
-                  </a:rPr>
-                  <a:t>. c) </a:t>
-                </a:r>
-                <a:r>
-                  <a:rPr lang="vi-VN"/>
-                  <a:t>\cos(\vec{a},\vec{b})=\frac{-3}{3\cdot\sqrt{3}}=-\frac{\sqrt{3}}{3}</a:t>
-                </a:r>
-                <a:r>
-                  <a:rPr sz="2000">
-                    <a:solidFill>
-                      <a:srgbClr val="1E293B"/>
-                    </a:solidFill>
-                    <a:latin typeface="Calibri"/>
-                  </a:rPr>
-                  <a:t>.</a:t>
-                </a:r>
-              </a:p>
-            </p:txBody>
-          </p:sp>
-        </mc:Fallback>
-      </mc:AlternateContent>
-      <p:sp>
-        <p:nvSpPr>
-          <p:cNvPr id="10" name="s2_nen"/>
-          <p:cNvSpPr/>
-          <p:nvPr/>
-        </p:nvSpPr>
-        <p:spPr>
-          <a:xfrm>
-            <a:off x="548640" y="4242816"/>
+            <a:off x="548640" y="4279392"/>
             <a:ext cx="11064240" cy="1011936"/>
           </a:xfrm>
           <a:prstGeom prst="roundRect">
@@ -33186,13 +33432,13 @@
         <mc:Choice xmlns:a14="http://schemas.microsoft.com/office/drawing/2010/main" Requires="a14">
           <p:sp>
             <p:nvSpPr>
-              <p:cNvPr id="11" name="s2_chu"/>
+              <p:cNvPr id="12" name="s3_chu"/>
               <p:cNvSpPr txBox="1"/>
               <p:nvPr/>
             </p:nvSpPr>
             <p:spPr>
               <a:xfrm>
-                <a:off x="713232" y="4279392"/>
+                <a:off x="713232" y="4315968"/>
                 <a:ext cx="10735056" cy="938784"/>
               </a:xfrm>
               <a:prstGeom prst="rect">
@@ -33626,13 +33872,13 @@
         <mc:Fallback>
           <p:sp>
             <p:nvSpPr>
-              <p:cNvPr id="11" name="TextBox 10"/>
+              <p:cNvPr id="12" name="TextBox 11"/>
               <p:cNvSpPr txBox="1"/>
               <p:nvPr/>
             </p:nvSpPr>
             <p:spPr>
               <a:xfrm>
-                <a:off x="713232" y="4279392"/>
+                <a:off x="713232" y="4315968"/>
                 <a:ext cx="10735056" cy="938784"/>
               </a:xfrm>
               <a:prstGeom prst="rect">
@@ -33932,21 +34178,66 @@
                                   </p:childTnLst>
                                 </p:cTn>
                               </p:par>
+                            </p:childTnLst>
+                          </p:cTn>
+                        </p:par>
+                      </p:childTnLst>
+                    </p:cTn>
+                  </p:par>
+                  <p:par>
+                    <p:cTn id="13" fill="hold">
+                      <p:stCondLst>
+                        <p:cond delay="indefinite"/>
+                      </p:stCondLst>
+                      <p:childTnLst>
+                        <p:par>
+                          <p:cTn id="14" fill="hold">
+                            <p:stCondLst>
+                              <p:cond delay="0"/>
+                            </p:stCondLst>
+                            <p:childTnLst>
                               <p:par>
-                                <p:cTn id="13" presetID="1" presetClass="entr" presetSubtype="0" fill="hold" nodeType="withEffect">
+                                <p:cTn id="15" presetID="1" presetClass="entr" presetSubtype="0" fill="hold" nodeType="clickEffect">
                                   <p:stCondLst>
                                     <p:cond delay="0"/>
                                   </p:stCondLst>
                                   <p:childTnLst>
                                     <p:set>
                                       <p:cBhvr>
-                                        <p:cTn id="14" dur="1" fill="hold">
+                                        <p:cTn id="16" dur="1" fill="hold">
                                           <p:stCondLst>
                                             <p:cond delay="0"/>
                                           </p:stCondLst>
                                         </p:cTn>
                                         <p:tgtEl>
                                           <p:spTgt spid="11"/>
+                                        </p:tgtEl>
+                                        <p:attrNameLst>
+                                          <p:attrName>style.visibility</p:attrName>
+                                        </p:attrNameLst>
+                                      </p:cBhvr>
+                                      <p:to>
+                                        <p:strVal val="visible"/>
+                                      </p:to>
+                                    </p:set>
+                                  </p:childTnLst>
+                                </p:cTn>
+                              </p:par>
+                              <p:par>
+                                <p:cTn id="17" presetID="1" presetClass="entr" presetSubtype="0" fill="hold" nodeType="withEffect">
+                                  <p:stCondLst>
+                                    <p:cond delay="0"/>
+                                  </p:stCondLst>
+                                  <p:childTnLst>
+                                    <p:set>
+                                      <p:cBhvr>
+                                        <p:cTn id="18" dur="1" fill="hold">
+                                          <p:stCondLst>
+                                            <p:cond delay="0"/>
+                                          </p:stCondLst>
+                                        </p:cTn>
+                                        <p:tgtEl>
+                                          <p:spTgt spid="12"/>
                                         </p:tgtEl>
                                         <p:attrNameLst>
                                           <p:attrName>style.visibility</p:attrName>

--- a/mon/toan/slide/lop12/BaiGiangDienTu_TOAN12_BaiTapCuoiChuong2_T40-41.pptx
+++ b/mon/toan/slide/lop12/BaiGiangDienTu_TOAN12_BaiTapCuoiChuong2_T40-41.pptx
@@ -5686,22 +5686,6 @@
                 </a:solidFill>
                 <a:latin typeface="Calibri"/>
               </a:rPr>
-              <a:t>Toán 12 – Kết nối tri thức với cuộc sống (SGK tập một, tr.73 – 74)</a:t>
-            </a:r>
-          </a:p>
-          <a:p>
-            <a:pPr algn="l">
-              <a:spcAft>
-                <a:spcPts val="800"/>
-              </a:spcAft>
-            </a:pPr>
-            <a:r>
-              <a:rPr sz="2200">
-                <a:solidFill>
-                  <a:srgbClr val="E0E7FF"/>
-                </a:solidFill>
-                <a:latin typeface="Calibri"/>
-              </a:rPr>
               <a:t>2 tiết: T40 – T41</a:t>
             </a:r>
           </a:p>
